--- a/clase_01_estrategia_transformacion/slides/slides_clase01_intermedio_enriquecido.pptx
+++ b/clase_01_estrategia_transformacion/slides/slides_clase01_intermedio_enriquecido.pptx
@@ -3248,13 +3248,13 @@
           <a:lstStyle/>
           <a:p>
             <a:r>
-              <a:rPr sz="1350" b="1">
+              <a:rPr sz="1250" b="1">
                 <a:solidFill>
                   <a:srgbClr val="FFFFFF"/>
                 </a:solidFill>
                 <a:latin typeface="Segoe UI"/>
               </a:rPr>
-              <a:t>Docentes: Ariel Giamportone, Soraya Corvalán</a:t>
+              <a:t>Docentes: Ariel Giamportone, Soraya Corvalán, María Ana Reussi, Soledad Gurisich</a:t>
             </a:r>
           </a:p>
         </p:txBody>

--- a/clase_01_estrategia_transformacion/slides/slides_clase01_intermedio_enriquecido.pptx
+++ b/clase_01_estrategia_transformacion/slides/slides_clase01_intermedio_enriquecido.pptx
@@ -3101,14 +3101,14 @@
       <p:grpSpPr/>
       <p:pic>
         <p:nvPicPr>
-          <p:cNvPr id="2" name="Picture 1" descr="cover_bg.png"/>
+          <p:cNvPr id="8" name="Picture 7" descr="cover_bg.png"/>
           <p:cNvPicPr>
             <a:picLocks noChangeAspect="1"/>
           </p:cNvPicPr>
           <p:nvPr/>
         </p:nvPicPr>
         <p:blipFill>
-          <a:blip r:embed="rId5"/>
+          <a:blip r:embed="rId6"/>
           <a:stretch>
             <a:fillRect/>
           </a:stretch>

--- a/clase_01_estrategia_transformacion/slides/slides_clase01_intermedio_enriquecido.pptx
+++ b/clase_01_estrategia_transformacion/slides/slides_clase01_intermedio_enriquecido.pptx
@@ -11,14 +11,17 @@
     <p:sldId id="259" r:id="rId10"/>
     <p:sldId id="260" r:id="rId11"/>
     <p:sldId id="261" r:id="rId12"/>
+    <p:sldId id="262" r:id="rId13"/>
     <p:sldId id="263" r:id="rId14"/>
     <p:sldId id="264" r:id="rId15"/>
     <p:sldId id="265" r:id="rId16"/>
     <p:sldId id="266" r:id="rId17"/>
     <p:sldId id="267" r:id="rId18"/>
-    <p:sldId id="262" r:id="rId13"/>
+    <p:sldId id="268" r:id="rId19"/>
+    <p:sldId id="269" r:id="rId20"/>
+    <p:sldId id="270" r:id="rId21"/>
   </p:sldIdLst>
-  <p:sldSz cx="12188952" cy="6858000" type="screen4x3"/>
+  <p:sldSz cx="12192000" cy="6858000" type="screen4x3"/>
   <p:notesSz cx="6858000" cy="9144000"/>
   <p:defaultTextStyle>
     <a:defPPr>
@@ -3101,14 +3104,14 @@
       <p:grpSpPr/>
       <p:pic>
         <p:nvPicPr>
-          <p:cNvPr id="8" name="Picture 7" descr="cover_bg.png"/>
+          <p:cNvPr id="2" name="Picture 1" descr="title_bg.png"/>
           <p:cNvPicPr>
             <a:picLocks noChangeAspect="1"/>
           </p:cNvPicPr>
           <p:nvPr/>
         </p:nvPicPr>
         <p:blipFill>
-          <a:blip r:embed="rId6"/>
+          <a:blip r:embed="rId2"/>
           <a:stretch>
             <a:fillRect/>
           </a:stretch>
@@ -3116,7 +3119,7 @@
         <p:spPr>
           <a:xfrm>
             <a:off x="0" y="0"/>
-            <a:ext cx="12188952" cy="6858000"/>
+            <a:ext cx="12192000" cy="6858000"/>
           </a:xfrm>
           <a:prstGeom prst="rect">
             <a:avLst/>
@@ -3131,8 +3134,8 @@
         </p:nvSpPr>
         <p:spPr>
           <a:xfrm>
-            <a:off x="566928" y="4041648"/>
-            <a:ext cx="8229600" cy="411480"/>
+            <a:off x="566928" y="2880360"/>
+            <a:ext cx="5486400" cy="457200"/>
           </a:xfrm>
           <a:prstGeom prst="rect">
             <a:avLst/>
@@ -3145,10 +3148,11 @@
           </a:bodyPr>
           <a:lstStyle/>
           <a:p>
-            <a:r>
-              <a:rPr sz="1500" b="1">
+            <a:pPr algn="l"/>
+            <a:r>
+              <a:rPr sz="2200" b="1">
                 <a:solidFill>
-                  <a:srgbClr val="E7C14B"/>
+                  <a:srgbClr val="F2B133"/>
                 </a:solidFill>
                 <a:latin typeface="Segoe UI"/>
               </a:rPr>
@@ -3165,8 +3169,8 @@
         </p:nvSpPr>
         <p:spPr>
           <a:xfrm>
-            <a:off x="548640" y="4389120"/>
-            <a:ext cx="9509760" cy="1371600"/>
+            <a:off x="548640" y="3200400"/>
+            <a:ext cx="10058400" cy="914400"/>
           </a:xfrm>
           <a:prstGeom prst="rect">
             <a:avLst/>
@@ -3179,8 +3183,9 @@
           </a:bodyPr>
           <a:lstStyle/>
           <a:p>
-            <a:r>
-              <a:rPr sz="3400" b="1">
+            <a:pPr algn="l"/>
+            <a:r>
+              <a:rPr sz="4100" b="1">
                 <a:solidFill>
                   <a:srgbClr val="FFFFFF"/>
                 </a:solidFill>
@@ -3199,8 +3204,8 @@
         </p:nvSpPr>
         <p:spPr>
           <a:xfrm>
-            <a:off x="566928" y="5623560"/>
-            <a:ext cx="9509760" cy="457200"/>
+            <a:off x="566928" y="4224528"/>
+            <a:ext cx="10058400" cy="457200"/>
           </a:xfrm>
           <a:prstGeom prst="rect">
             <a:avLst/>
@@ -3213,10 +3218,11 @@
           </a:bodyPr>
           <a:lstStyle/>
           <a:p>
-            <a:r>
-              <a:rPr sz="1550" b="0">
+            <a:pPr algn="l"/>
+            <a:r>
+              <a:rPr sz="1800" b="0">
                 <a:solidFill>
-                  <a:srgbClr val="DDE9F0"/>
+                  <a:srgbClr val="CFE6F2"/>
                 </a:solidFill>
                 <a:latin typeface="Segoe UI"/>
               </a:rPr>
@@ -3233,8 +3239,8 @@
         </p:nvSpPr>
         <p:spPr>
           <a:xfrm>
-            <a:off x="566928" y="6108192"/>
-            <a:ext cx="9509760" cy="365760"/>
+            <a:off x="566928" y="4800600"/>
+            <a:ext cx="10058400" cy="365760"/>
           </a:xfrm>
           <a:prstGeom prst="rect">
             <a:avLst/>
@@ -3247,14 +3253,15 @@
           </a:bodyPr>
           <a:lstStyle/>
           <a:p>
-            <a:r>
-              <a:rPr sz="1250" b="1">
+            <a:pPr algn="l"/>
+            <a:r>
+              <a:rPr sz="1400" b="1">
                 <a:solidFill>
                   <a:srgbClr val="FFFFFF"/>
                 </a:solidFill>
                 <a:latin typeface="Segoe UI"/>
               </a:rPr>
-              <a:t>Docentes: Ariel Giamportone, Soraya Corvalán, María Ana Reussi, Soledad Gurisich</a:t>
+              <a:t>Docentes: Ariel Giamportone · Soraya Corvalán · María Ana Reussi · Soledad Gurisich</a:t>
             </a:r>
           </a:p>
         </p:txBody>
@@ -3267,8 +3274,8 @@
         </p:nvSpPr>
         <p:spPr>
           <a:xfrm>
-            <a:off x="566928" y="6455664"/>
-            <a:ext cx="10607040" cy="320040"/>
+            <a:off x="566928" y="5138928"/>
+            <a:ext cx="10058400" cy="365760"/>
           </a:xfrm>
           <a:prstGeom prst="rect">
             <a:avLst/>
@@ -3281,14 +3288,15 @@
           </a:bodyPr>
           <a:lstStyle/>
           <a:p>
-            <a:r>
-              <a:rPr sz="1000" b="0">
+            <a:pPr algn="l"/>
+            <a:r>
+              <a:rPr sz="1150" b="0">
                 <a:solidFill>
-                  <a:srgbClr val="DDE9F0"/>
+                  <a:srgbClr val="AFCEDE"/>
                 </a:solidFill>
                 <a:latin typeface="Segoe UI"/>
               </a:rPr>
-              <a:t>Inteligencia Artificial Aplicada a la Produccion Pesquera  |  UTN FRCh  |  2026</a:t>
+              <a:t>Inteligencia Artificial Aplicada a la Producción Pesquera  |  UTN FRCh  |  PesquerosEnIA  |  2026</a:t>
             </a:r>
           </a:p>
         </p:txBody>
@@ -3313,7 +3321,7 @@
       <p:grpSpPr/>
       <p:pic>
         <p:nvPicPr>
-          <p:cNvPr id="2" name="Picture 1" descr="c1_3.png"/>
+          <p:cNvPr id="2" name="Picture 1" descr="img_ais.png"/>
           <p:cNvPicPr>
             <a:picLocks noChangeAspect="1"/>
           </p:cNvPicPr>
@@ -3328,7 +3336,7 @@
         <p:spPr>
           <a:xfrm>
             <a:off x="0" y="0"/>
-            <a:ext cx="12188952" cy="6858000"/>
+            <a:ext cx="12192000" cy="6858000"/>
           </a:xfrm>
           <a:prstGeom prst="rect">
             <a:avLst/>
@@ -3355,7 +3363,7 @@
       <p:grpSpPr/>
       <p:pic>
         <p:nvPicPr>
-          <p:cNvPr id="2" name="Picture 1" descr="c1_d1.png"/>
+          <p:cNvPr id="2" name="Picture 1" descr="img_iuu.png"/>
           <p:cNvPicPr>
             <a:picLocks noChangeAspect="1"/>
           </p:cNvPicPr>
@@ -3370,7 +3378,7 @@
         <p:spPr>
           <a:xfrm>
             <a:off x="0" y="0"/>
-            <a:ext cx="12188952" cy="6858000"/>
+            <a:ext cx="12192000" cy="6858000"/>
           </a:xfrm>
           <a:prstGeom prst="rect">
             <a:avLst/>
@@ -3397,7 +3405,7 @@
       <p:grpSpPr/>
       <p:pic>
         <p:nvPicPr>
-          <p:cNvPr id="2" name="Picture 1" descr="c1_d2.png"/>
+          <p:cNvPr id="2" name="Picture 1" descr="img_combustible.png"/>
           <p:cNvPicPr>
             <a:picLocks noChangeAspect="1"/>
           </p:cNvPicPr>
@@ -3412,7 +3420,133 @@
         <p:spPr>
           <a:xfrm>
             <a:off x="0" y="0"/>
-            <a:ext cx="12188952" cy="6858000"/>
+            <a:ext cx="12192000" cy="6858000"/>
+          </a:xfrm>
+          <a:prstGeom prst="rect">
+            <a:avLst/>
+          </a:prstGeom>
+        </p:spPr>
+      </p:pic>
+    </p:spTree>
+  </p:cSld>
+  <p:clrMapOvr>
+    <a:masterClrMapping/>
+  </p:clrMapOvr>
+</p:sld>
+</file>
+
+<file path=ppt/slides/slide13.xml><?xml version="1.0" encoding="utf-8"?>
+<p:sld xmlns:a="http://schemas.openxmlformats.org/drawingml/2006/main" xmlns:p="http://schemas.openxmlformats.org/presentationml/2006/main" xmlns:r="http://schemas.openxmlformats.org/officeDocument/2006/relationships">
+  <p:cSld>
+    <p:spTree>
+      <p:nvGrpSpPr>
+        <p:cNvPr id="1" name=""/>
+        <p:cNvGrpSpPr/>
+        <p:nvPr/>
+      </p:nvGrpSpPr>
+      <p:grpSpPr/>
+      <p:pic>
+        <p:nvPicPr>
+          <p:cNvPr id="2" name="Picture 1" descr="img_brecha.png"/>
+          <p:cNvPicPr>
+            <a:picLocks noChangeAspect="1"/>
+          </p:cNvPicPr>
+          <p:nvPr/>
+        </p:nvPicPr>
+        <p:blipFill>
+          <a:blip r:embed="rId2"/>
+          <a:stretch>
+            <a:fillRect/>
+          </a:stretch>
+        </p:blipFill>
+        <p:spPr>
+          <a:xfrm>
+            <a:off x="0" y="0"/>
+            <a:ext cx="12192000" cy="6858000"/>
+          </a:xfrm>
+          <a:prstGeom prst="rect">
+            <a:avLst/>
+          </a:prstGeom>
+        </p:spPr>
+      </p:pic>
+    </p:spTree>
+  </p:cSld>
+  <p:clrMapOvr>
+    <a:masterClrMapping/>
+  </p:clrMapOvr>
+</p:sld>
+</file>
+
+<file path=ppt/slides/slide14.xml><?xml version="1.0" encoding="utf-8"?>
+<p:sld xmlns:a="http://schemas.openxmlformats.org/drawingml/2006/main" xmlns:p="http://schemas.openxmlformats.org/presentationml/2006/main" xmlns:r="http://schemas.openxmlformats.org/officeDocument/2006/relationships">
+  <p:cSld>
+    <p:spTree>
+      <p:nvGrpSpPr>
+        <p:cNvPr id="1" name=""/>
+        <p:cNvGrpSpPr/>
+        <p:nvPr/>
+      </p:nvGrpSpPr>
+      <p:grpSpPr/>
+      <p:pic>
+        <p:nvPicPr>
+          <p:cNvPr id="2" name="Picture 1" descr="reuse_fruta.png"/>
+          <p:cNvPicPr>
+            <a:picLocks noChangeAspect="1"/>
+          </p:cNvPicPr>
+          <p:nvPr/>
+        </p:nvPicPr>
+        <p:blipFill>
+          <a:blip r:embed="rId2"/>
+          <a:stretch>
+            <a:fillRect/>
+          </a:stretch>
+        </p:blipFill>
+        <p:spPr>
+          <a:xfrm>
+            <a:off x="0" y="0"/>
+            <a:ext cx="12192000" cy="6858000"/>
+          </a:xfrm>
+          <a:prstGeom prst="rect">
+            <a:avLst/>
+          </a:prstGeom>
+        </p:spPr>
+      </p:pic>
+    </p:spTree>
+  </p:cSld>
+  <p:clrMapOvr>
+    <a:masterClrMapping/>
+  </p:clrMapOvr>
+</p:sld>
+</file>
+
+<file path=ppt/slides/slide15.xml><?xml version="1.0" encoding="utf-8"?>
+<p:sld xmlns:a="http://schemas.openxmlformats.org/drawingml/2006/main" xmlns:p="http://schemas.openxmlformats.org/presentationml/2006/main" xmlns:r="http://schemas.openxmlformats.org/officeDocument/2006/relationships">
+  <p:cSld>
+    <p:spTree>
+      <p:nvGrpSpPr>
+        <p:cNvPr id="1" name=""/>
+        <p:cNvGrpSpPr/>
+        <p:nvPr/>
+      </p:nvGrpSpPr>
+      <p:grpSpPr/>
+      <p:pic>
+        <p:nvPicPr>
+          <p:cNvPr id="2" name="Picture 1" descr="img_cierre.png"/>
+          <p:cNvPicPr>
+            <a:picLocks noChangeAspect="1"/>
+          </p:cNvPicPr>
+          <p:nvPr/>
+        </p:nvPicPr>
+        <p:blipFill>
+          <a:blip r:embed="rId2"/>
+          <a:stretch>
+            <a:fillRect/>
+          </a:stretch>
+        </p:blipFill>
+        <p:spPr>
+          <a:xfrm>
+            <a:off x="0" y="0"/>
+            <a:ext cx="12192000" cy="6858000"/>
           </a:xfrm>
           <a:prstGeom prst="rect">
             <a:avLst/>
@@ -3437,929 +3571,9 @@
         <p:nvPr/>
       </p:nvGrpSpPr>
       <p:grpSpPr/>
-      <p:sp>
-        <p:nvSpPr>
-          <p:cNvPr id="2" name="Rectangle 1"/>
-          <p:cNvSpPr/>
-          <p:nvPr/>
-        </p:nvSpPr>
-        <p:spPr>
-          <a:xfrm>
-            <a:off x="0" y="0"/>
-            <a:ext cx="12188952" cy="6858000"/>
-          </a:xfrm>
-          <a:prstGeom prst="rect">
-            <a:avLst/>
-          </a:prstGeom>
-          <a:solidFill>
-            <a:srgbClr val="F5F7FA"/>
-          </a:solidFill>
-          <a:ln>
-            <a:noFill/>
-          </a:ln>
-        </p:spPr>
-        <p:style>
-          <a:lnRef idx="1">
-            <a:schemeClr val="accent1"/>
-          </a:lnRef>
-          <a:fillRef idx="3">
-            <a:schemeClr val="accent1"/>
-          </a:fillRef>
-          <a:effectRef idx="2">
-            <a:schemeClr val="accent1"/>
-          </a:effectRef>
-          <a:fontRef idx="minor">
-            <a:schemeClr val="lt1"/>
-          </a:fontRef>
-        </p:style>
-        <p:txBody>
-          <a:bodyPr rtlCol="0" anchor="ctr"/>
-          <a:lstStyle/>
-          <a:p>
-            <a:pPr algn="ctr"/>
-          </a:p>
-        </p:txBody>
-      </p:sp>
-      <p:sp>
-        <p:nvSpPr>
-          <p:cNvPr id="3" name="Rectangle 2"/>
-          <p:cNvSpPr/>
-          <p:nvPr/>
-        </p:nvSpPr>
-        <p:spPr>
-          <a:xfrm>
-            <a:off x="0" y="0"/>
-            <a:ext cx="201168" cy="6858000"/>
-          </a:xfrm>
-          <a:prstGeom prst="rect">
-            <a:avLst/>
-          </a:prstGeom>
-          <a:solidFill>
-            <a:srgbClr val="00467F"/>
-          </a:solidFill>
-          <a:ln>
-            <a:noFill/>
-          </a:ln>
-        </p:spPr>
-        <p:style>
-          <a:lnRef idx="1">
-            <a:schemeClr val="accent1"/>
-          </a:lnRef>
-          <a:fillRef idx="3">
-            <a:schemeClr val="accent1"/>
-          </a:fillRef>
-          <a:effectRef idx="2">
-            <a:schemeClr val="accent1"/>
-          </a:effectRef>
-          <a:fontRef idx="minor">
-            <a:schemeClr val="lt1"/>
-          </a:fontRef>
-        </p:style>
-        <p:txBody>
-          <a:bodyPr rtlCol="0" anchor="ctr"/>
-          <a:lstStyle/>
-          <a:p>
-            <a:pPr algn="ctr"/>
-          </a:p>
-        </p:txBody>
-      </p:sp>
-      <p:sp>
-        <p:nvSpPr>
-          <p:cNvPr id="4" name="Rectangle 3"/>
-          <p:cNvSpPr/>
-          <p:nvPr/>
-        </p:nvSpPr>
-        <p:spPr>
-          <a:xfrm>
-            <a:off x="0" y="0"/>
-            <a:ext cx="12188952" cy="1280160"/>
-          </a:xfrm>
-          <a:prstGeom prst="rect">
-            <a:avLst/>
-          </a:prstGeom>
-          <a:solidFill>
-            <a:srgbClr val="00467F"/>
-          </a:solidFill>
-          <a:ln>
-            <a:noFill/>
-          </a:ln>
-        </p:spPr>
-        <p:style>
-          <a:lnRef idx="1">
-            <a:schemeClr val="accent1"/>
-          </a:lnRef>
-          <a:fillRef idx="3">
-            <a:schemeClr val="accent1"/>
-          </a:fillRef>
-          <a:effectRef idx="2">
-            <a:schemeClr val="accent1"/>
-          </a:effectRef>
-          <a:fontRef idx="minor">
-            <a:schemeClr val="lt1"/>
-          </a:fontRef>
-        </p:style>
-        <p:txBody>
-          <a:bodyPr rtlCol="0" anchor="ctr"/>
-          <a:lstStyle/>
-          <a:p>
-            <a:pPr algn="ctr"/>
-          </a:p>
-        </p:txBody>
-      </p:sp>
-      <p:sp>
-        <p:nvSpPr>
-          <p:cNvPr id="5" name="TextBox 4"/>
-          <p:cNvSpPr txBox="1"/>
-          <p:nvPr/>
-        </p:nvSpPr>
-        <p:spPr>
-          <a:xfrm>
-            <a:off x="365760" y="73152"/>
-            <a:ext cx="11274552" cy="502920"/>
-          </a:xfrm>
-          <a:prstGeom prst="rect">
-            <a:avLst/>
-          </a:prstGeom>
-          <a:noFill/>
-        </p:spPr>
-        <p:txBody>
-          <a:bodyPr wrap="square">
-            <a:spAutoFit/>
-          </a:bodyPr>
-          <a:lstStyle/>
-          <a:p>
-            <a:pPr algn="l"/>
-            <a:r>
-              <a:rPr sz="1300" b="1" i="0">
-                <a:solidFill>
-                  <a:srgbClr val="E7C14B"/>
-                </a:solidFill>
-                <a:latin typeface="Calibri"/>
-              </a:rPr>
-              <a:t>AGENDA DE LA CLASE</a:t>
-            </a:r>
-          </a:p>
-        </p:txBody>
-      </p:sp>
-      <p:sp>
-        <p:nvSpPr>
-          <p:cNvPr id="6" name="TextBox 5"/>
-          <p:cNvSpPr txBox="1"/>
-          <p:nvPr/>
-        </p:nvSpPr>
-        <p:spPr>
-          <a:xfrm>
-            <a:off x="365760" y="502920"/>
-            <a:ext cx="11274552" cy="685800"/>
-          </a:xfrm>
-          <a:prstGeom prst="rect">
-            <a:avLst/>
-          </a:prstGeom>
-          <a:noFill/>
-        </p:spPr>
-        <p:txBody>
-          <a:bodyPr wrap="square">
-            <a:spAutoFit/>
-          </a:bodyPr>
-          <a:lstStyle/>
-          <a:p>
-            <a:pPr algn="l"/>
-            <a:r>
-              <a:rPr sz="2600" b="1" i="0">
-                <a:solidFill>
-                  <a:srgbClr val="FFFFFF"/>
-                </a:solidFill>
-                <a:latin typeface="Calibri"/>
-              </a:rPr>
-              <a:t>Lo que vamos a ver hoy</a:t>
-            </a:r>
-          </a:p>
-        </p:txBody>
-      </p:sp>
-      <p:sp>
-        <p:nvSpPr>
-          <p:cNvPr id="7" name="Rectangle 6"/>
-          <p:cNvSpPr/>
-          <p:nvPr/>
-        </p:nvSpPr>
-        <p:spPr>
-          <a:xfrm>
-            <a:off x="457200" y="1554480"/>
-            <a:ext cx="411480" cy="411480"/>
-          </a:xfrm>
-          <a:prstGeom prst="rect">
-            <a:avLst/>
-          </a:prstGeom>
-          <a:solidFill>
-            <a:srgbClr val="00467F"/>
-          </a:solidFill>
-          <a:ln>
-            <a:noFill/>
-          </a:ln>
-        </p:spPr>
-        <p:style>
-          <a:lnRef idx="1">
-            <a:schemeClr val="accent1"/>
-          </a:lnRef>
-          <a:fillRef idx="3">
-            <a:schemeClr val="accent1"/>
-          </a:fillRef>
-          <a:effectRef idx="2">
-            <a:schemeClr val="accent1"/>
-          </a:effectRef>
-          <a:fontRef idx="minor">
-            <a:schemeClr val="lt1"/>
-          </a:fontRef>
-        </p:style>
-        <p:txBody>
-          <a:bodyPr rtlCol="0" anchor="ctr"/>
-          <a:lstStyle/>
-          <a:p>
-            <a:pPr algn="ctr"/>
-          </a:p>
-        </p:txBody>
-      </p:sp>
-      <p:sp>
-        <p:nvSpPr>
-          <p:cNvPr id="8" name="TextBox 7"/>
-          <p:cNvSpPr txBox="1"/>
-          <p:nvPr/>
-        </p:nvSpPr>
-        <p:spPr>
-          <a:xfrm>
-            <a:off x="457200" y="1527048"/>
-            <a:ext cx="411480" cy="411480"/>
-          </a:xfrm>
-          <a:prstGeom prst="rect">
-            <a:avLst/>
-          </a:prstGeom>
-          <a:noFill/>
-        </p:spPr>
-        <p:txBody>
-          <a:bodyPr wrap="square">
-            <a:spAutoFit/>
-          </a:bodyPr>
-          <a:lstStyle/>
-          <a:p>
-            <a:pPr algn="ctr"/>
-            <a:r>
-              <a:rPr sz="1600" b="1" i="0">
-                <a:solidFill>
-                  <a:srgbClr val="FFFFFF"/>
-                </a:solidFill>
-                <a:latin typeface="Calibri"/>
-              </a:rPr>
-              <a:t>1</a:t>
-            </a:r>
-          </a:p>
-        </p:txBody>
-      </p:sp>
-      <p:sp>
-        <p:nvSpPr>
-          <p:cNvPr id="9" name="TextBox 8"/>
-          <p:cNvSpPr txBox="1"/>
-          <p:nvPr/>
-        </p:nvSpPr>
-        <p:spPr>
-          <a:xfrm>
-            <a:off x="960120" y="1508760"/>
-            <a:ext cx="4951476" cy="548640"/>
-          </a:xfrm>
-          <a:prstGeom prst="rect">
-            <a:avLst/>
-          </a:prstGeom>
-          <a:noFill/>
-        </p:spPr>
-        <p:txBody>
-          <a:bodyPr wrap="square">
-            <a:spAutoFit/>
-          </a:bodyPr>
-          <a:lstStyle/>
-          <a:p>
-            <a:pPr algn="l"/>
-            <a:r>
-              <a:rPr sz="1500" b="0" i="0">
-                <a:solidFill>
-                  <a:srgbClr val="1E1E32"/>
-                </a:solidFill>
-                <a:latin typeface="Calibri"/>
-              </a:rPr>
-              <a:t>El sector pesquero argentino en cifras</a:t>
-            </a:r>
-          </a:p>
-        </p:txBody>
-      </p:sp>
-      <p:sp>
-        <p:nvSpPr>
-          <p:cNvPr id="10" name="Rectangle 9"/>
-          <p:cNvSpPr/>
-          <p:nvPr/>
-        </p:nvSpPr>
-        <p:spPr>
-          <a:xfrm>
-            <a:off x="6185916" y="1554480"/>
-            <a:ext cx="411480" cy="411480"/>
-          </a:xfrm>
-          <a:prstGeom prst="rect">
-            <a:avLst/>
-          </a:prstGeom>
-          <a:solidFill>
-            <a:srgbClr val="00467F"/>
-          </a:solidFill>
-          <a:ln>
-            <a:noFill/>
-          </a:ln>
-        </p:spPr>
-        <p:style>
-          <a:lnRef idx="1">
-            <a:schemeClr val="accent1"/>
-          </a:lnRef>
-          <a:fillRef idx="3">
-            <a:schemeClr val="accent1"/>
-          </a:fillRef>
-          <a:effectRef idx="2">
-            <a:schemeClr val="accent1"/>
-          </a:effectRef>
-          <a:fontRef idx="minor">
-            <a:schemeClr val="lt1"/>
-          </a:fontRef>
-        </p:style>
-        <p:txBody>
-          <a:bodyPr rtlCol="0" anchor="ctr"/>
-          <a:lstStyle/>
-          <a:p>
-            <a:pPr algn="ctr"/>
-          </a:p>
-        </p:txBody>
-      </p:sp>
-      <p:sp>
-        <p:nvSpPr>
-          <p:cNvPr id="11" name="TextBox 10"/>
-          <p:cNvSpPr txBox="1"/>
-          <p:nvPr/>
-        </p:nvSpPr>
-        <p:spPr>
-          <a:xfrm>
-            <a:off x="6185916" y="1527048"/>
-            <a:ext cx="411480" cy="411480"/>
-          </a:xfrm>
-          <a:prstGeom prst="rect">
-            <a:avLst/>
-          </a:prstGeom>
-          <a:noFill/>
-        </p:spPr>
-        <p:txBody>
-          <a:bodyPr wrap="square">
-            <a:spAutoFit/>
-          </a:bodyPr>
-          <a:lstStyle/>
-          <a:p>
-            <a:pPr algn="ctr"/>
-            <a:r>
-              <a:rPr sz="1600" b="1" i="0">
-                <a:solidFill>
-                  <a:srgbClr val="FFFFFF"/>
-                </a:solidFill>
-                <a:latin typeface="Calibri"/>
-              </a:rPr>
-              <a:t>2</a:t>
-            </a:r>
-          </a:p>
-        </p:txBody>
-      </p:sp>
-      <p:sp>
-        <p:nvSpPr>
-          <p:cNvPr id="12" name="TextBox 11"/>
-          <p:cNvSpPr txBox="1"/>
-          <p:nvPr/>
-        </p:nvSpPr>
-        <p:spPr>
-          <a:xfrm>
-            <a:off x="6688836" y="1508760"/>
-            <a:ext cx="4951476" cy="548640"/>
-          </a:xfrm>
-          <a:prstGeom prst="rect">
-            <a:avLst/>
-          </a:prstGeom>
-          <a:noFill/>
-        </p:spPr>
-        <p:txBody>
-          <a:bodyPr wrap="square">
-            <a:spAutoFit/>
-          </a:bodyPr>
-          <a:lstStyle/>
-          <a:p>
-            <a:pPr algn="l"/>
-            <a:r>
-              <a:rPr sz="1500" b="0" i="0">
-                <a:solidFill>
-                  <a:srgbClr val="1E1E32"/>
-                </a:solidFill>
-                <a:latin typeface="Calibri"/>
-              </a:rPr>
-              <a:t>Industria 4.0 y el mar</a:t>
-            </a:r>
-          </a:p>
-        </p:txBody>
-      </p:sp>
-      <p:sp>
-        <p:nvSpPr>
-          <p:cNvPr id="13" name="Rectangle 12"/>
-          <p:cNvSpPr/>
-          <p:nvPr/>
-        </p:nvSpPr>
-        <p:spPr>
-          <a:xfrm>
-            <a:off x="457200" y="2212848"/>
-            <a:ext cx="411480" cy="411480"/>
-          </a:xfrm>
-          <a:prstGeom prst="rect">
-            <a:avLst/>
-          </a:prstGeom>
-          <a:solidFill>
-            <a:srgbClr val="00467F"/>
-          </a:solidFill>
-          <a:ln>
-            <a:noFill/>
-          </a:ln>
-        </p:spPr>
-        <p:style>
-          <a:lnRef idx="1">
-            <a:schemeClr val="accent1"/>
-          </a:lnRef>
-          <a:fillRef idx="3">
-            <a:schemeClr val="accent1"/>
-          </a:fillRef>
-          <a:effectRef idx="2">
-            <a:schemeClr val="accent1"/>
-          </a:effectRef>
-          <a:fontRef idx="minor">
-            <a:schemeClr val="lt1"/>
-          </a:fontRef>
-        </p:style>
-        <p:txBody>
-          <a:bodyPr rtlCol="0" anchor="ctr"/>
-          <a:lstStyle/>
-          <a:p>
-            <a:pPr algn="ctr"/>
-          </a:p>
-        </p:txBody>
-      </p:sp>
-      <p:sp>
-        <p:nvSpPr>
-          <p:cNvPr id="14" name="TextBox 13"/>
-          <p:cNvSpPr txBox="1"/>
-          <p:nvPr/>
-        </p:nvSpPr>
-        <p:spPr>
-          <a:xfrm>
-            <a:off x="457200" y="2185416"/>
-            <a:ext cx="411480" cy="411480"/>
-          </a:xfrm>
-          <a:prstGeom prst="rect">
-            <a:avLst/>
-          </a:prstGeom>
-          <a:noFill/>
-        </p:spPr>
-        <p:txBody>
-          <a:bodyPr wrap="square">
-            <a:spAutoFit/>
-          </a:bodyPr>
-          <a:lstStyle/>
-          <a:p>
-            <a:pPr algn="ctr"/>
-            <a:r>
-              <a:rPr sz="1600" b="1" i="0">
-                <a:solidFill>
-                  <a:srgbClr val="FFFFFF"/>
-                </a:solidFill>
-                <a:latin typeface="Calibri"/>
-              </a:rPr>
-              <a:t>3</a:t>
-            </a:r>
-          </a:p>
-        </p:txBody>
-      </p:sp>
-      <p:sp>
-        <p:nvSpPr>
-          <p:cNvPr id="15" name="TextBox 14"/>
-          <p:cNvSpPr txBox="1"/>
-          <p:nvPr/>
-        </p:nvSpPr>
-        <p:spPr>
-          <a:xfrm>
-            <a:off x="960120" y="2167128"/>
-            <a:ext cx="4951476" cy="548640"/>
-          </a:xfrm>
-          <a:prstGeom prst="rect">
-            <a:avLst/>
-          </a:prstGeom>
-          <a:noFill/>
-        </p:spPr>
-        <p:txBody>
-          <a:bodyPr wrap="square">
-            <a:spAutoFit/>
-          </a:bodyPr>
-          <a:lstStyle/>
-          <a:p>
-            <a:pPr algn="l"/>
-            <a:r>
-              <a:rPr sz="1500" b="0" i="0">
-                <a:solidFill>
-                  <a:srgbClr val="1E1E32"/>
-                </a:solidFill>
-                <a:latin typeface="Calibri"/>
-              </a:rPr>
-              <a:t>Smart Fisheries: los 4 pilares</a:t>
-            </a:r>
-          </a:p>
-        </p:txBody>
-      </p:sp>
-      <p:sp>
-        <p:nvSpPr>
-          <p:cNvPr id="16" name="Rectangle 15"/>
-          <p:cNvSpPr/>
-          <p:nvPr/>
-        </p:nvSpPr>
-        <p:spPr>
-          <a:xfrm>
-            <a:off x="6185916" y="2212848"/>
-            <a:ext cx="411480" cy="411480"/>
-          </a:xfrm>
-          <a:prstGeom prst="rect">
-            <a:avLst/>
-          </a:prstGeom>
-          <a:solidFill>
-            <a:srgbClr val="00467F"/>
-          </a:solidFill>
-          <a:ln>
-            <a:noFill/>
-          </a:ln>
-        </p:spPr>
-        <p:style>
-          <a:lnRef idx="1">
-            <a:schemeClr val="accent1"/>
-          </a:lnRef>
-          <a:fillRef idx="3">
-            <a:schemeClr val="accent1"/>
-          </a:fillRef>
-          <a:effectRef idx="2">
-            <a:schemeClr val="accent1"/>
-          </a:effectRef>
-          <a:fontRef idx="minor">
-            <a:schemeClr val="lt1"/>
-          </a:fontRef>
-        </p:style>
-        <p:txBody>
-          <a:bodyPr rtlCol="0" anchor="ctr"/>
-          <a:lstStyle/>
-          <a:p>
-            <a:pPr algn="ctr"/>
-          </a:p>
-        </p:txBody>
-      </p:sp>
-      <p:sp>
-        <p:nvSpPr>
-          <p:cNvPr id="17" name="TextBox 16"/>
-          <p:cNvSpPr txBox="1"/>
-          <p:nvPr/>
-        </p:nvSpPr>
-        <p:spPr>
-          <a:xfrm>
-            <a:off x="6185916" y="2185416"/>
-            <a:ext cx="411480" cy="411480"/>
-          </a:xfrm>
-          <a:prstGeom prst="rect">
-            <a:avLst/>
-          </a:prstGeom>
-          <a:noFill/>
-        </p:spPr>
-        <p:txBody>
-          <a:bodyPr wrap="square">
-            <a:spAutoFit/>
-          </a:bodyPr>
-          <a:lstStyle/>
-          <a:p>
-            <a:pPr algn="ctr"/>
-            <a:r>
-              <a:rPr sz="1600" b="1" i="0">
-                <a:solidFill>
-                  <a:srgbClr val="FFFFFF"/>
-                </a:solidFill>
-                <a:latin typeface="Calibri"/>
-              </a:rPr>
-              <a:t>4</a:t>
-            </a:r>
-          </a:p>
-        </p:txBody>
-      </p:sp>
-      <p:sp>
-        <p:nvSpPr>
-          <p:cNvPr id="18" name="TextBox 17"/>
-          <p:cNvSpPr txBox="1"/>
-          <p:nvPr/>
-        </p:nvSpPr>
-        <p:spPr>
-          <a:xfrm>
-            <a:off x="6688836" y="2167128"/>
-            <a:ext cx="4951476" cy="548640"/>
-          </a:xfrm>
-          <a:prstGeom prst="rect">
-            <a:avLst/>
-          </a:prstGeom>
-          <a:noFill/>
-        </p:spPr>
-        <p:txBody>
-          <a:bodyPr wrap="square">
-            <a:spAutoFit/>
-          </a:bodyPr>
-          <a:lstStyle/>
-          <a:p>
-            <a:pPr algn="l"/>
-            <a:r>
-              <a:rPr sz="1500" b="0" i="0">
-                <a:solidFill>
-                  <a:srgbClr val="1E1E32"/>
-                </a:solidFill>
-                <a:latin typeface="Calibri"/>
-              </a:rPr>
-              <a:t>Casos de uso de IA (5)</a:t>
-            </a:r>
-          </a:p>
-        </p:txBody>
-      </p:sp>
-      <p:sp>
-        <p:nvSpPr>
-          <p:cNvPr id="19" name="Rectangle 18"/>
-          <p:cNvSpPr/>
-          <p:nvPr/>
-        </p:nvSpPr>
-        <p:spPr>
-          <a:xfrm>
-            <a:off x="457200" y="2871216"/>
-            <a:ext cx="411480" cy="411480"/>
-          </a:xfrm>
-          <a:prstGeom prst="rect">
-            <a:avLst/>
-          </a:prstGeom>
-          <a:solidFill>
-            <a:srgbClr val="00467F"/>
-          </a:solidFill>
-          <a:ln>
-            <a:noFill/>
-          </a:ln>
-        </p:spPr>
-        <p:style>
-          <a:lnRef idx="1">
-            <a:schemeClr val="accent1"/>
-          </a:lnRef>
-          <a:fillRef idx="3">
-            <a:schemeClr val="accent1"/>
-          </a:fillRef>
-          <a:effectRef idx="2">
-            <a:schemeClr val="accent1"/>
-          </a:effectRef>
-          <a:fontRef idx="minor">
-            <a:schemeClr val="lt1"/>
-          </a:fontRef>
-        </p:style>
-        <p:txBody>
-          <a:bodyPr rtlCol="0" anchor="ctr"/>
-          <a:lstStyle/>
-          <a:p>
-            <a:pPr algn="ctr"/>
-          </a:p>
-        </p:txBody>
-      </p:sp>
-      <p:sp>
-        <p:nvSpPr>
-          <p:cNvPr id="20" name="TextBox 19"/>
-          <p:cNvSpPr txBox="1"/>
-          <p:nvPr/>
-        </p:nvSpPr>
-        <p:spPr>
-          <a:xfrm>
-            <a:off x="457200" y="2843784"/>
-            <a:ext cx="411480" cy="411480"/>
-          </a:xfrm>
-          <a:prstGeom prst="rect">
-            <a:avLst/>
-          </a:prstGeom>
-          <a:noFill/>
-        </p:spPr>
-        <p:txBody>
-          <a:bodyPr wrap="square">
-            <a:spAutoFit/>
-          </a:bodyPr>
-          <a:lstStyle/>
-          <a:p>
-            <a:pPr algn="ctr"/>
-            <a:r>
-              <a:rPr sz="1600" b="1" i="0">
-                <a:solidFill>
-                  <a:srgbClr val="FFFFFF"/>
-                </a:solidFill>
-                <a:latin typeface="Calibri"/>
-              </a:rPr>
-              <a:t>5</a:t>
-            </a:r>
-          </a:p>
-        </p:txBody>
-      </p:sp>
-      <p:sp>
-        <p:nvSpPr>
-          <p:cNvPr id="21" name="TextBox 20"/>
-          <p:cNvSpPr txBox="1"/>
-          <p:nvPr/>
-        </p:nvSpPr>
-        <p:spPr>
-          <a:xfrm>
-            <a:off x="960120" y="2825496"/>
-            <a:ext cx="4951476" cy="548640"/>
-          </a:xfrm>
-          <a:prstGeom prst="rect">
-            <a:avLst/>
-          </a:prstGeom>
-          <a:noFill/>
-        </p:spPr>
-        <p:txBody>
-          <a:bodyPr wrap="square">
-            <a:spAutoFit/>
-          </a:bodyPr>
-          <a:lstStyle/>
-          <a:p>
-            <a:pPr algn="l"/>
-            <a:r>
-              <a:rPr sz="1500" b="0" i="0">
-                <a:solidFill>
-                  <a:srgbClr val="1E1E32"/>
-                </a:solidFill>
-                <a:latin typeface="Calibri"/>
-              </a:rPr>
-              <a:t>La brecha tecnológica argentina</a:t>
-            </a:r>
-          </a:p>
-        </p:txBody>
-      </p:sp>
-      <p:sp>
-        <p:nvSpPr>
-          <p:cNvPr id="22" name="Rectangle 21"/>
-          <p:cNvSpPr/>
-          <p:nvPr/>
-        </p:nvSpPr>
-        <p:spPr>
-          <a:xfrm>
-            <a:off x="6185916" y="2871216"/>
-            <a:ext cx="411480" cy="411480"/>
-          </a:xfrm>
-          <a:prstGeom prst="rect">
-            <a:avLst/>
-          </a:prstGeom>
-          <a:solidFill>
-            <a:srgbClr val="00467F"/>
-          </a:solidFill>
-          <a:ln>
-            <a:noFill/>
-          </a:ln>
-        </p:spPr>
-        <p:style>
-          <a:lnRef idx="1">
-            <a:schemeClr val="accent1"/>
-          </a:lnRef>
-          <a:fillRef idx="3">
-            <a:schemeClr val="accent1"/>
-          </a:fillRef>
-          <a:effectRef idx="2">
-            <a:schemeClr val="accent1"/>
-          </a:effectRef>
-          <a:fontRef idx="minor">
-            <a:schemeClr val="lt1"/>
-          </a:fontRef>
-        </p:style>
-        <p:txBody>
-          <a:bodyPr rtlCol="0" anchor="ctr"/>
-          <a:lstStyle/>
-          <a:p>
-            <a:pPr algn="ctr"/>
-          </a:p>
-        </p:txBody>
-      </p:sp>
-      <p:sp>
-        <p:nvSpPr>
-          <p:cNvPr id="23" name="TextBox 22"/>
-          <p:cNvSpPr txBox="1"/>
-          <p:nvPr/>
-        </p:nvSpPr>
-        <p:spPr>
-          <a:xfrm>
-            <a:off x="6185916" y="2843784"/>
-            <a:ext cx="411480" cy="411480"/>
-          </a:xfrm>
-          <a:prstGeom prst="rect">
-            <a:avLst/>
-          </a:prstGeom>
-          <a:noFill/>
-        </p:spPr>
-        <p:txBody>
-          <a:bodyPr wrap="square">
-            <a:spAutoFit/>
-          </a:bodyPr>
-          <a:lstStyle/>
-          <a:p>
-            <a:pPr algn="ctr"/>
-            <a:r>
-              <a:rPr sz="1600" b="1" i="0">
-                <a:solidFill>
-                  <a:srgbClr val="FFFFFF"/>
-                </a:solidFill>
-                <a:latin typeface="Calibri"/>
-              </a:rPr>
-              <a:t>6</a:t>
-            </a:r>
-          </a:p>
-        </p:txBody>
-      </p:sp>
-      <p:sp>
-        <p:nvSpPr>
-          <p:cNvPr id="24" name="TextBox 23"/>
-          <p:cNvSpPr txBox="1"/>
-          <p:nvPr/>
-        </p:nvSpPr>
-        <p:spPr>
-          <a:xfrm>
-            <a:off x="6688836" y="2825496"/>
-            <a:ext cx="4951476" cy="548640"/>
-          </a:xfrm>
-          <a:prstGeom prst="rect">
-            <a:avLst/>
-          </a:prstGeom>
-          <a:noFill/>
-        </p:spPr>
-        <p:txBody>
-          <a:bodyPr wrap="square">
-            <a:spAutoFit/>
-          </a:bodyPr>
-          <a:lstStyle/>
-          <a:p>
-            <a:pPr algn="l"/>
-            <a:r>
-              <a:rPr sz="1500" b="0" i="0">
-                <a:solidFill>
-                  <a:srgbClr val="1E1E32"/>
-                </a:solidFill>
-                <a:latin typeface="Calibri"/>
-              </a:rPr>
-              <a:t>Antecedentes: CONIPE y PesquerosEnIA</a:t>
-            </a:r>
-          </a:p>
-        </p:txBody>
-      </p:sp>
-      <p:sp>
-        <p:nvSpPr>
-          <p:cNvPr id="25" name="Rectangle 24"/>
-          <p:cNvSpPr/>
-          <p:nvPr/>
-        </p:nvSpPr>
-        <p:spPr>
-          <a:xfrm>
-            <a:off x="0" y="6419088"/>
-            <a:ext cx="12188952" cy="438912"/>
-          </a:xfrm>
-          <a:prstGeom prst="rect">
-            <a:avLst/>
-          </a:prstGeom>
-          <a:solidFill>
-            <a:srgbClr val="00467F"/>
-          </a:solidFill>
-          <a:ln>
-            <a:noFill/>
-          </a:ln>
-        </p:spPr>
-        <p:style>
-          <a:lnRef idx="1">
-            <a:schemeClr val="accent1"/>
-          </a:lnRef>
-          <a:fillRef idx="3">
-            <a:schemeClr val="accent1"/>
-          </a:fillRef>
-          <a:effectRef idx="2">
-            <a:schemeClr val="accent1"/>
-          </a:effectRef>
-          <a:fontRef idx="minor">
-            <a:schemeClr val="lt1"/>
-          </a:fontRef>
-        </p:style>
-        <p:txBody>
-          <a:bodyPr rtlCol="0" anchor="ctr"/>
-          <a:lstStyle/>
-          <a:p>
-            <a:pPr algn="ctr"/>
-          </a:p>
-        </p:txBody>
-      </p:sp>
       <p:pic>
         <p:nvPicPr>
-          <p:cNvPr id="26" name="Picture 25" descr="logo_pesqueros_symbol.png"/>
+          <p:cNvPr id="2" name="Picture 1" descr="img_agenda.png"/>
           <p:cNvPicPr>
             <a:picLocks noChangeAspect="1"/>
           </p:cNvPicPr>
@@ -4373,49 +3587,14 @@
         </p:blipFill>
         <p:spPr>
           <a:xfrm>
-            <a:off x="137160" y="6455664"/>
-            <a:ext cx="347472" cy="347472"/>
+            <a:off x="0" y="0"/>
+            <a:ext cx="12192000" cy="6858000"/>
           </a:xfrm>
           <a:prstGeom prst="rect">
             <a:avLst/>
           </a:prstGeom>
         </p:spPr>
       </p:pic>
-      <p:sp>
-        <p:nvSpPr>
-          <p:cNvPr id="27" name="TextBox 26"/>
-          <p:cNvSpPr txBox="1"/>
-          <p:nvPr/>
-        </p:nvSpPr>
-        <p:spPr>
-          <a:xfrm>
-            <a:off x="594360" y="6455664"/>
-            <a:ext cx="11457432" cy="347472"/>
-          </a:xfrm>
-          <a:prstGeom prst="rect">
-            <a:avLst/>
-          </a:prstGeom>
-          <a:noFill/>
-        </p:spPr>
-        <p:txBody>
-          <a:bodyPr wrap="square">
-            <a:spAutoFit/>
-          </a:bodyPr>
-          <a:lstStyle/>
-          <a:p>
-            <a:pPr algn="ctr"/>
-            <a:r>
-              <a:rPr sz="1000" b="0" i="0">
-                <a:solidFill>
-                  <a:srgbClr val="FFFFFF"/>
-                </a:solidFill>
-                <a:latin typeface="Calibri"/>
-              </a:rPr>
-              <a:t>IA Aplicada a la Produccion Pesquera  |  UTN FRCh  |  PesquerosEnIA  |  2026</a:t>
-            </a:r>
-          </a:p>
-        </p:txBody>
-      </p:sp>
     </p:spTree>
   </p:cSld>
   <p:clrMapOvr>
@@ -4434,350 +3613,9 @@
         <p:nvPr/>
       </p:nvGrpSpPr>
       <p:grpSpPr/>
-      <p:sp>
-        <p:nvSpPr>
-          <p:cNvPr id="2" name="Rectangle 1"/>
-          <p:cNvSpPr/>
-          <p:nvPr/>
-        </p:nvSpPr>
-        <p:spPr>
-          <a:xfrm>
-            <a:off x="0" y="0"/>
-            <a:ext cx="12188952" cy="6858000"/>
-          </a:xfrm>
-          <a:prstGeom prst="rect">
-            <a:avLst/>
-          </a:prstGeom>
-          <a:solidFill>
-            <a:srgbClr val="F5F7FA"/>
-          </a:solidFill>
-          <a:ln>
-            <a:noFill/>
-          </a:ln>
-        </p:spPr>
-        <p:style>
-          <a:lnRef idx="1">
-            <a:schemeClr val="accent1"/>
-          </a:lnRef>
-          <a:fillRef idx="3">
-            <a:schemeClr val="accent1"/>
-          </a:fillRef>
-          <a:effectRef idx="2">
-            <a:schemeClr val="accent1"/>
-          </a:effectRef>
-          <a:fontRef idx="minor">
-            <a:schemeClr val="lt1"/>
-          </a:fontRef>
-        </p:style>
-        <p:txBody>
-          <a:bodyPr rtlCol="0" anchor="ctr"/>
-          <a:lstStyle/>
-          <a:p>
-            <a:pPr algn="ctr"/>
-          </a:p>
-        </p:txBody>
-      </p:sp>
-      <p:sp>
-        <p:nvSpPr>
-          <p:cNvPr id="3" name="Rectangle 2"/>
-          <p:cNvSpPr/>
-          <p:nvPr/>
-        </p:nvSpPr>
-        <p:spPr>
-          <a:xfrm>
-            <a:off x="0" y="0"/>
-            <a:ext cx="201168" cy="6858000"/>
-          </a:xfrm>
-          <a:prstGeom prst="rect">
-            <a:avLst/>
-          </a:prstGeom>
-          <a:solidFill>
-            <a:srgbClr val="00467F"/>
-          </a:solidFill>
-          <a:ln>
-            <a:noFill/>
-          </a:ln>
-        </p:spPr>
-        <p:style>
-          <a:lnRef idx="1">
-            <a:schemeClr val="accent1"/>
-          </a:lnRef>
-          <a:fillRef idx="3">
-            <a:schemeClr val="accent1"/>
-          </a:fillRef>
-          <a:effectRef idx="2">
-            <a:schemeClr val="accent1"/>
-          </a:effectRef>
-          <a:fontRef idx="minor">
-            <a:schemeClr val="lt1"/>
-          </a:fontRef>
-        </p:style>
-        <p:txBody>
-          <a:bodyPr rtlCol="0" anchor="ctr"/>
-          <a:lstStyle/>
-          <a:p>
-            <a:pPr algn="ctr"/>
-          </a:p>
-        </p:txBody>
-      </p:sp>
-      <p:sp>
-        <p:nvSpPr>
-          <p:cNvPr id="4" name="Rectangle 3"/>
-          <p:cNvSpPr/>
-          <p:nvPr/>
-        </p:nvSpPr>
-        <p:spPr>
-          <a:xfrm>
-            <a:off x="0" y="0"/>
-            <a:ext cx="12188952" cy="1371600"/>
-          </a:xfrm>
-          <a:prstGeom prst="rect">
-            <a:avLst/>
-          </a:prstGeom>
-          <a:solidFill>
-            <a:srgbClr val="00467F"/>
-          </a:solidFill>
-          <a:ln>
-            <a:noFill/>
-          </a:ln>
-        </p:spPr>
-        <p:style>
-          <a:lnRef idx="1">
-            <a:schemeClr val="accent1"/>
-          </a:lnRef>
-          <a:fillRef idx="3">
-            <a:schemeClr val="accent1"/>
-          </a:fillRef>
-          <a:effectRef idx="2">
-            <a:schemeClr val="accent1"/>
-          </a:effectRef>
-          <a:fontRef idx="minor">
-            <a:schemeClr val="lt1"/>
-          </a:fontRef>
-        </p:style>
-        <p:txBody>
-          <a:bodyPr rtlCol="0" anchor="ctr"/>
-          <a:lstStyle/>
-          <a:p>
-            <a:pPr algn="ctr"/>
-          </a:p>
-        </p:txBody>
-      </p:sp>
-      <p:sp>
-        <p:nvSpPr>
-          <p:cNvPr id="5" name="TextBox 4"/>
-          <p:cNvSpPr txBox="1"/>
-          <p:nvPr/>
-        </p:nvSpPr>
-        <p:spPr>
-          <a:xfrm>
-            <a:off x="365760" y="73152"/>
-            <a:ext cx="11274552" cy="411480"/>
-          </a:xfrm>
-          <a:prstGeom prst="rect">
-            <a:avLst/>
-          </a:prstGeom>
-          <a:noFill/>
-        </p:spPr>
-        <p:txBody>
-          <a:bodyPr wrap="square">
-            <a:spAutoFit/>
-          </a:bodyPr>
-          <a:lstStyle/>
-          <a:p>
-            <a:pPr algn="l"/>
-            <a:r>
-              <a:rPr sz="1100" b="1" i="0">
-                <a:solidFill>
-                  <a:srgbClr val="E7C14B"/>
-                </a:solidFill>
-                <a:latin typeface="Calibri"/>
-              </a:rPr>
-              <a:t>CARACTERÍSTICAS ÚNICAS DEL SECTOR</a:t>
-            </a:r>
-          </a:p>
-        </p:txBody>
-      </p:sp>
-      <p:sp>
-        <p:nvSpPr>
-          <p:cNvPr id="6" name="TextBox 5"/>
-          <p:cNvSpPr txBox="1"/>
-          <p:nvPr/>
-        </p:nvSpPr>
-        <p:spPr>
-          <a:xfrm>
-            <a:off x="365760" y="365760"/>
-            <a:ext cx="11091672" cy="914400"/>
-          </a:xfrm>
-          <a:prstGeom prst="rect">
-            <a:avLst/>
-          </a:prstGeom>
-          <a:noFill/>
-        </p:spPr>
-        <p:txBody>
-          <a:bodyPr wrap="square">
-            <a:spAutoFit/>
-          </a:bodyPr>
-          <a:lstStyle/>
-          <a:p>
-            <a:pPr algn="l"/>
-            <a:r>
-              <a:rPr sz="2600" b="1" i="0">
-                <a:solidFill>
-                  <a:srgbClr val="FFFFFF"/>
-                </a:solidFill>
-                <a:latin typeface="Calibri"/>
-              </a:rPr>
-              <a:t>Industria 4.0 llega al mar</a:t>
-            </a:r>
-          </a:p>
-        </p:txBody>
-      </p:sp>
-      <p:sp>
-        <p:nvSpPr>
-          <p:cNvPr id="7" name="TextBox 6"/>
-          <p:cNvSpPr txBox="1"/>
-          <p:nvPr/>
-        </p:nvSpPr>
-        <p:spPr>
-          <a:xfrm>
-            <a:off x="457200" y="1508760"/>
-            <a:ext cx="11457432" cy="5029200"/>
-          </a:xfrm>
-          <a:prstGeom prst="rect">
-            <a:avLst/>
-          </a:prstGeom>
-          <a:noFill/>
-        </p:spPr>
-        <p:txBody>
-          <a:bodyPr wrap="square">
-            <a:spAutoFit/>
-          </a:bodyPr>
-          <a:lstStyle/>
-          <a:p>
-            <a:pPr>
-              <a:spcBef>
-                <a:spcPts val="400"/>
-              </a:spcBef>
-              <a:spcAft>
-                <a:spcPts val="200"/>
-              </a:spcAft>
-            </a:pPr>
-            <a:r>
-              <a:rPr sz="1700" b="1">
-                <a:solidFill>
-                  <a:srgbClr val="1E1E32"/>
-                </a:solidFill>
-                <a:latin typeface="Calibri"/>
-              </a:rPr>
-              <a:t>• IoT, Big Data, IA, automatización, conectividad</a:t>
-            </a:r>
-          </a:p>
-          <a:p>
-            <a:pPr>
-              <a:spcBef>
-                <a:spcPts val="400"/>
-              </a:spcBef>
-              <a:spcAft>
-                <a:spcPts val="200"/>
-              </a:spcAft>
-            </a:pPr>
-            <a:r>
-              <a:rPr sz="1700" b="1">
-                <a:solidFill>
-                  <a:srgbClr val="1E1E32"/>
-                </a:solidFill>
-                <a:latin typeface="Calibri"/>
-              </a:rPr>
-              <a:t>• Recurso biológico variable → predicción</a:t>
-            </a:r>
-          </a:p>
-          <a:p>
-            <a:pPr>
-              <a:spcBef>
-                <a:spcPts val="400"/>
-              </a:spcBef>
-              <a:spcAft>
-                <a:spcPts val="200"/>
-              </a:spcAft>
-            </a:pPr>
-            <a:r>
-              <a:rPr sz="1700" b="1">
-                <a:solidFill>
-                  <a:srgbClr val="1E1E32"/>
-                </a:solidFill>
-                <a:latin typeface="Calibri"/>
-              </a:rPr>
-              <a:t>• Ambiente hostil → monitoreo remoto</a:t>
-            </a:r>
-          </a:p>
-          <a:p>
-            <a:pPr>
-              <a:spcBef>
-                <a:spcPts val="400"/>
-              </a:spcBef>
-              <a:spcAft>
-                <a:spcPts val="200"/>
-              </a:spcAft>
-            </a:pPr>
-            <a:r>
-              <a:rPr sz="1700" b="1">
-                <a:solidFill>
-                  <a:srgbClr val="1E1E32"/>
-                </a:solidFill>
-                <a:latin typeface="Calibri"/>
-              </a:rPr>
-              <a:t>• Regulación estricta → automatización de reportes</a:t>
-            </a:r>
-          </a:p>
-        </p:txBody>
-      </p:sp>
-      <p:sp>
-        <p:nvSpPr>
-          <p:cNvPr id="8" name="Rectangle 7"/>
-          <p:cNvSpPr/>
-          <p:nvPr/>
-        </p:nvSpPr>
-        <p:spPr>
-          <a:xfrm>
-            <a:off x="0" y="6419088"/>
-            <a:ext cx="12188952" cy="438912"/>
-          </a:xfrm>
-          <a:prstGeom prst="rect">
-            <a:avLst/>
-          </a:prstGeom>
-          <a:solidFill>
-            <a:srgbClr val="00467F"/>
-          </a:solidFill>
-          <a:ln>
-            <a:noFill/>
-          </a:ln>
-        </p:spPr>
-        <p:style>
-          <a:lnRef idx="1">
-            <a:schemeClr val="accent1"/>
-          </a:lnRef>
-          <a:fillRef idx="3">
-            <a:schemeClr val="accent1"/>
-          </a:fillRef>
-          <a:effectRef idx="2">
-            <a:schemeClr val="accent1"/>
-          </a:effectRef>
-          <a:fontRef idx="minor">
-            <a:schemeClr val="lt1"/>
-          </a:fontRef>
-        </p:style>
-        <p:txBody>
-          <a:bodyPr rtlCol="0" anchor="ctr"/>
-          <a:lstStyle/>
-          <a:p>
-            <a:pPr algn="ctr"/>
-          </a:p>
-        </p:txBody>
-      </p:sp>
       <p:pic>
         <p:nvPicPr>
-          <p:cNvPr id="9" name="Picture 8" descr="logo_pesqueros_symbol.png"/>
+          <p:cNvPr id="2" name="Picture 1" descr="reuse_argentina.png"/>
           <p:cNvPicPr>
             <a:picLocks noChangeAspect="1"/>
           </p:cNvPicPr>
@@ -4791,49 +3629,14 @@
         </p:blipFill>
         <p:spPr>
           <a:xfrm>
-            <a:off x="137160" y="6455664"/>
-            <a:ext cx="347472" cy="347472"/>
+            <a:off x="0" y="0"/>
+            <a:ext cx="12192000" cy="6858000"/>
           </a:xfrm>
           <a:prstGeom prst="rect">
             <a:avLst/>
           </a:prstGeom>
         </p:spPr>
       </p:pic>
-      <p:sp>
-        <p:nvSpPr>
-          <p:cNvPr id="10" name="TextBox 9"/>
-          <p:cNvSpPr txBox="1"/>
-          <p:nvPr/>
-        </p:nvSpPr>
-        <p:spPr>
-          <a:xfrm>
-            <a:off x="594360" y="6455664"/>
-            <a:ext cx="11457432" cy="347472"/>
-          </a:xfrm>
-          <a:prstGeom prst="rect">
-            <a:avLst/>
-          </a:prstGeom>
-          <a:noFill/>
-        </p:spPr>
-        <p:txBody>
-          <a:bodyPr wrap="square">
-            <a:spAutoFit/>
-          </a:bodyPr>
-          <a:lstStyle/>
-          <a:p>
-            <a:pPr algn="ctr"/>
-            <a:r>
-              <a:rPr sz="1000" b="0" i="0">
-                <a:solidFill>
-                  <a:srgbClr val="FFFFFF"/>
-                </a:solidFill>
-                <a:latin typeface="Calibri"/>
-              </a:rPr>
-              <a:t>IA Aplicada a la Produccion Pesquera  |  UTN FRCh  |  PesquerosEnIA  |  2026</a:t>
-            </a:r>
-          </a:p>
-        </p:txBody>
-      </p:sp>
     </p:spTree>
   </p:cSld>
   <p:clrMapOvr>
@@ -4852,350 +3655,9 @@
         <p:nvPr/>
       </p:nvGrpSpPr>
       <p:grpSpPr/>
-      <p:sp>
-        <p:nvSpPr>
-          <p:cNvPr id="2" name="Rectangle 1"/>
-          <p:cNvSpPr/>
-          <p:nvPr/>
-        </p:nvSpPr>
-        <p:spPr>
-          <a:xfrm>
-            <a:off x="0" y="0"/>
-            <a:ext cx="12188952" cy="6858000"/>
-          </a:xfrm>
-          <a:prstGeom prst="rect">
-            <a:avLst/>
-          </a:prstGeom>
-          <a:solidFill>
-            <a:srgbClr val="F5F7FA"/>
-          </a:solidFill>
-          <a:ln>
-            <a:noFill/>
-          </a:ln>
-        </p:spPr>
-        <p:style>
-          <a:lnRef idx="1">
-            <a:schemeClr val="accent1"/>
-          </a:lnRef>
-          <a:fillRef idx="3">
-            <a:schemeClr val="accent1"/>
-          </a:fillRef>
-          <a:effectRef idx="2">
-            <a:schemeClr val="accent1"/>
-          </a:effectRef>
-          <a:fontRef idx="minor">
-            <a:schemeClr val="lt1"/>
-          </a:fontRef>
-        </p:style>
-        <p:txBody>
-          <a:bodyPr rtlCol="0" anchor="ctr"/>
-          <a:lstStyle/>
-          <a:p>
-            <a:pPr algn="ctr"/>
-          </a:p>
-        </p:txBody>
-      </p:sp>
-      <p:sp>
-        <p:nvSpPr>
-          <p:cNvPr id="3" name="Rectangle 2"/>
-          <p:cNvSpPr/>
-          <p:nvPr/>
-        </p:nvSpPr>
-        <p:spPr>
-          <a:xfrm>
-            <a:off x="0" y="0"/>
-            <a:ext cx="201168" cy="6858000"/>
-          </a:xfrm>
-          <a:prstGeom prst="rect">
-            <a:avLst/>
-          </a:prstGeom>
-          <a:solidFill>
-            <a:srgbClr val="00467F"/>
-          </a:solidFill>
-          <a:ln>
-            <a:noFill/>
-          </a:ln>
-        </p:spPr>
-        <p:style>
-          <a:lnRef idx="1">
-            <a:schemeClr val="accent1"/>
-          </a:lnRef>
-          <a:fillRef idx="3">
-            <a:schemeClr val="accent1"/>
-          </a:fillRef>
-          <a:effectRef idx="2">
-            <a:schemeClr val="accent1"/>
-          </a:effectRef>
-          <a:fontRef idx="minor">
-            <a:schemeClr val="lt1"/>
-          </a:fontRef>
-        </p:style>
-        <p:txBody>
-          <a:bodyPr rtlCol="0" anchor="ctr"/>
-          <a:lstStyle/>
-          <a:p>
-            <a:pPr algn="ctr"/>
-          </a:p>
-        </p:txBody>
-      </p:sp>
-      <p:sp>
-        <p:nvSpPr>
-          <p:cNvPr id="4" name="Rectangle 3"/>
-          <p:cNvSpPr/>
-          <p:nvPr/>
-        </p:nvSpPr>
-        <p:spPr>
-          <a:xfrm>
-            <a:off x="0" y="0"/>
-            <a:ext cx="12188952" cy="1371600"/>
-          </a:xfrm>
-          <a:prstGeom prst="rect">
-            <a:avLst/>
-          </a:prstGeom>
-          <a:solidFill>
-            <a:srgbClr val="00467F"/>
-          </a:solidFill>
-          <a:ln>
-            <a:noFill/>
-          </a:ln>
-        </p:spPr>
-        <p:style>
-          <a:lnRef idx="1">
-            <a:schemeClr val="accent1"/>
-          </a:lnRef>
-          <a:fillRef idx="3">
-            <a:schemeClr val="accent1"/>
-          </a:fillRef>
-          <a:effectRef idx="2">
-            <a:schemeClr val="accent1"/>
-          </a:effectRef>
-          <a:fontRef idx="minor">
-            <a:schemeClr val="lt1"/>
-          </a:fontRef>
-        </p:style>
-        <p:txBody>
-          <a:bodyPr rtlCol="0" anchor="ctr"/>
-          <a:lstStyle/>
-          <a:p>
-            <a:pPr algn="ctr"/>
-          </a:p>
-        </p:txBody>
-      </p:sp>
-      <p:sp>
-        <p:nvSpPr>
-          <p:cNvPr id="5" name="TextBox 4"/>
-          <p:cNvSpPr txBox="1"/>
-          <p:nvPr/>
-        </p:nvSpPr>
-        <p:spPr>
-          <a:xfrm>
-            <a:off x="365760" y="73152"/>
-            <a:ext cx="11274552" cy="411480"/>
-          </a:xfrm>
-          <a:prstGeom prst="rect">
-            <a:avLst/>
-          </a:prstGeom>
-          <a:noFill/>
-        </p:spPr>
-        <p:txBody>
-          <a:bodyPr wrap="square">
-            <a:spAutoFit/>
-          </a:bodyPr>
-          <a:lstStyle/>
-          <a:p>
-            <a:pPr algn="l"/>
-            <a:r>
-              <a:rPr sz="1100" b="1" i="0">
-                <a:solidFill>
-                  <a:srgbClr val="E7C14B"/>
-                </a:solidFill>
-                <a:latin typeface="Calibri"/>
-              </a:rPr>
-              <a:t>EFICIENCIA, SOSTENIBILIDAD, TRAZABILIDAD, CUMPLIMIENTO</a:t>
-            </a:r>
-          </a:p>
-        </p:txBody>
-      </p:sp>
-      <p:sp>
-        <p:nvSpPr>
-          <p:cNvPr id="6" name="TextBox 5"/>
-          <p:cNvSpPr txBox="1"/>
-          <p:nvPr/>
-        </p:nvSpPr>
-        <p:spPr>
-          <a:xfrm>
-            <a:off x="365760" y="365760"/>
-            <a:ext cx="11091672" cy="914400"/>
-          </a:xfrm>
-          <a:prstGeom prst="rect">
-            <a:avLst/>
-          </a:prstGeom>
-          <a:noFill/>
-        </p:spPr>
-        <p:txBody>
-          <a:bodyPr wrap="square">
-            <a:spAutoFit/>
-          </a:bodyPr>
-          <a:lstStyle/>
-          <a:p>
-            <a:pPr algn="l"/>
-            <a:r>
-              <a:rPr sz="2600" b="1" i="0">
-                <a:solidFill>
-                  <a:srgbClr val="FFFFFF"/>
-                </a:solidFill>
-                <a:latin typeface="Calibri"/>
-              </a:rPr>
-              <a:t>Smart Fisheries: 4 pilares</a:t>
-            </a:r>
-          </a:p>
-        </p:txBody>
-      </p:sp>
-      <p:sp>
-        <p:nvSpPr>
-          <p:cNvPr id="7" name="TextBox 6"/>
-          <p:cNvSpPr txBox="1"/>
-          <p:nvPr/>
-        </p:nvSpPr>
-        <p:spPr>
-          <a:xfrm>
-            <a:off x="457200" y="1508760"/>
-            <a:ext cx="11457432" cy="5029200"/>
-          </a:xfrm>
-          <a:prstGeom prst="rect">
-            <a:avLst/>
-          </a:prstGeom>
-          <a:noFill/>
-        </p:spPr>
-        <p:txBody>
-          <a:bodyPr wrap="square">
-            <a:spAutoFit/>
-          </a:bodyPr>
-          <a:lstStyle/>
-          <a:p>
-            <a:pPr>
-              <a:spcBef>
-                <a:spcPts val="400"/>
-              </a:spcBef>
-              <a:spcAft>
-                <a:spcPts val="200"/>
-              </a:spcAft>
-            </a:pPr>
-            <a:r>
-              <a:rPr sz="1700" b="1">
-                <a:solidFill>
-                  <a:srgbClr val="1E1E32"/>
-                </a:solidFill>
-                <a:latin typeface="Calibri"/>
-              </a:rPr>
-              <a:t>• Datos (sensores, AIS, satélite, partes)</a:t>
-            </a:r>
-          </a:p>
-          <a:p>
-            <a:pPr>
-              <a:spcBef>
-                <a:spcPts val="400"/>
-              </a:spcBef>
-              <a:spcAft>
-                <a:spcPts val="200"/>
-              </a:spcAft>
-            </a:pPr>
-            <a:r>
-              <a:rPr sz="1700" b="1">
-                <a:solidFill>
-                  <a:srgbClr val="1E1E32"/>
-                </a:solidFill>
-                <a:latin typeface="Calibri"/>
-              </a:rPr>
-              <a:t>• Análisis (ML/IA, dashboards en tiempo real)</a:t>
-            </a:r>
-          </a:p>
-          <a:p>
-            <a:pPr>
-              <a:spcBef>
-                <a:spcPts val="400"/>
-              </a:spcBef>
-              <a:spcAft>
-                <a:spcPts val="200"/>
-              </a:spcAft>
-            </a:pPr>
-            <a:r>
-              <a:rPr sz="1700" b="1">
-                <a:solidFill>
-                  <a:srgbClr val="1E1E32"/>
-                </a:solidFill>
-                <a:latin typeface="Calibri"/>
-              </a:rPr>
-              <a:t>• Decisión (ruta, zona, velocidad, parada)</a:t>
-            </a:r>
-          </a:p>
-          <a:p>
-            <a:pPr>
-              <a:spcBef>
-                <a:spcPts val="400"/>
-              </a:spcBef>
-              <a:spcAft>
-                <a:spcPts val="200"/>
-              </a:spcAft>
-            </a:pPr>
-            <a:r>
-              <a:rPr sz="1700" b="1">
-                <a:solidFill>
-                  <a:srgbClr val="1E1E32"/>
-                </a:solidFill>
-                <a:latin typeface="Calibri"/>
-              </a:rPr>
-              <a:t>• Acción (capitán, planta, regulador)</a:t>
-            </a:r>
-          </a:p>
-        </p:txBody>
-      </p:sp>
-      <p:sp>
-        <p:nvSpPr>
-          <p:cNvPr id="8" name="Rectangle 7"/>
-          <p:cNvSpPr/>
-          <p:nvPr/>
-        </p:nvSpPr>
-        <p:spPr>
-          <a:xfrm>
-            <a:off x="0" y="6419088"/>
-            <a:ext cx="12188952" cy="438912"/>
-          </a:xfrm>
-          <a:prstGeom prst="rect">
-            <a:avLst/>
-          </a:prstGeom>
-          <a:solidFill>
-            <a:srgbClr val="00467F"/>
-          </a:solidFill>
-          <a:ln>
-            <a:noFill/>
-          </a:ln>
-        </p:spPr>
-        <p:style>
-          <a:lnRef idx="1">
-            <a:schemeClr val="accent1"/>
-          </a:lnRef>
-          <a:fillRef idx="3">
-            <a:schemeClr val="accent1"/>
-          </a:fillRef>
-          <a:effectRef idx="2">
-            <a:schemeClr val="accent1"/>
-          </a:effectRef>
-          <a:fontRef idx="minor">
-            <a:schemeClr val="lt1"/>
-          </a:fontRef>
-        </p:style>
-        <p:txBody>
-          <a:bodyPr rtlCol="0" anchor="ctr"/>
-          <a:lstStyle/>
-          <a:p>
-            <a:pPr algn="ctr"/>
-          </a:p>
-        </p:txBody>
-      </p:sp>
       <p:pic>
         <p:nvPicPr>
-          <p:cNvPr id="9" name="Picture 8" descr="logo_pesqueros_symbol.png"/>
+          <p:cNvPr id="2" name="Picture 1" descr="reuse_acuicultura.png"/>
           <p:cNvPicPr>
             <a:picLocks noChangeAspect="1"/>
           </p:cNvPicPr>
@@ -5209,49 +3671,14 @@
         </p:blipFill>
         <p:spPr>
           <a:xfrm>
-            <a:off x="137160" y="6455664"/>
-            <a:ext cx="347472" cy="347472"/>
+            <a:off x="0" y="0"/>
+            <a:ext cx="12192000" cy="6858000"/>
           </a:xfrm>
           <a:prstGeom prst="rect">
             <a:avLst/>
           </a:prstGeom>
         </p:spPr>
       </p:pic>
-      <p:sp>
-        <p:nvSpPr>
-          <p:cNvPr id="10" name="TextBox 9"/>
-          <p:cNvSpPr txBox="1"/>
-          <p:nvPr/>
-        </p:nvSpPr>
-        <p:spPr>
-          <a:xfrm>
-            <a:off x="594360" y="6455664"/>
-            <a:ext cx="11457432" cy="347472"/>
-          </a:xfrm>
-          <a:prstGeom prst="rect">
-            <a:avLst/>
-          </a:prstGeom>
-          <a:noFill/>
-        </p:spPr>
-        <p:txBody>
-          <a:bodyPr wrap="square">
-            <a:spAutoFit/>
-          </a:bodyPr>
-          <a:lstStyle/>
-          <a:p>
-            <a:pPr algn="ctr"/>
-            <a:r>
-              <a:rPr sz="1000" b="0" i="0">
-                <a:solidFill>
-                  <a:srgbClr val="FFFFFF"/>
-                </a:solidFill>
-                <a:latin typeface="Calibri"/>
-              </a:rPr>
-              <a:t>IA Aplicada a la Produccion Pesquera  |  UTN FRCh  |  PesquerosEnIA  |  2026</a:t>
-            </a:r>
-          </a:p>
-        </p:txBody>
-      </p:sp>
     </p:spTree>
   </p:cSld>
   <p:clrMapOvr>
@@ -5270,859 +3697,9 @@
         <p:nvPr/>
       </p:nvGrpSpPr>
       <p:grpSpPr/>
-      <p:sp>
-        <p:nvSpPr>
-          <p:cNvPr id="2" name="Rectangle 1"/>
-          <p:cNvSpPr/>
-          <p:nvPr/>
-        </p:nvSpPr>
-        <p:spPr>
-          <a:xfrm>
-            <a:off x="0" y="0"/>
-            <a:ext cx="12188952" cy="6858000"/>
-          </a:xfrm>
-          <a:prstGeom prst="rect">
-            <a:avLst/>
-          </a:prstGeom>
-          <a:solidFill>
-            <a:srgbClr val="F5F7FA"/>
-          </a:solidFill>
-          <a:ln>
-            <a:noFill/>
-          </a:ln>
-        </p:spPr>
-        <p:style>
-          <a:lnRef idx="1">
-            <a:schemeClr val="accent1"/>
-          </a:lnRef>
-          <a:fillRef idx="3">
-            <a:schemeClr val="accent1"/>
-          </a:fillRef>
-          <a:effectRef idx="2">
-            <a:schemeClr val="accent1"/>
-          </a:effectRef>
-          <a:fontRef idx="minor">
-            <a:schemeClr val="lt1"/>
-          </a:fontRef>
-        </p:style>
-        <p:txBody>
-          <a:bodyPr rtlCol="0" anchor="ctr"/>
-          <a:lstStyle/>
-          <a:p>
-            <a:pPr algn="ctr"/>
-          </a:p>
-        </p:txBody>
-      </p:sp>
-      <p:sp>
-        <p:nvSpPr>
-          <p:cNvPr id="3" name="Rectangle 2"/>
-          <p:cNvSpPr/>
-          <p:nvPr/>
-        </p:nvSpPr>
-        <p:spPr>
-          <a:xfrm>
-            <a:off x="0" y="0"/>
-            <a:ext cx="201168" cy="6858000"/>
-          </a:xfrm>
-          <a:prstGeom prst="rect">
-            <a:avLst/>
-          </a:prstGeom>
-          <a:solidFill>
-            <a:srgbClr val="00467F"/>
-          </a:solidFill>
-          <a:ln>
-            <a:noFill/>
-          </a:ln>
-        </p:spPr>
-        <p:style>
-          <a:lnRef idx="1">
-            <a:schemeClr val="accent1"/>
-          </a:lnRef>
-          <a:fillRef idx="3">
-            <a:schemeClr val="accent1"/>
-          </a:fillRef>
-          <a:effectRef idx="2">
-            <a:schemeClr val="accent1"/>
-          </a:effectRef>
-          <a:fontRef idx="minor">
-            <a:schemeClr val="lt1"/>
-          </a:fontRef>
-        </p:style>
-        <p:txBody>
-          <a:bodyPr rtlCol="0" anchor="ctr"/>
-          <a:lstStyle/>
-          <a:p>
-            <a:pPr algn="ctr"/>
-          </a:p>
-        </p:txBody>
-      </p:sp>
-      <p:sp>
-        <p:nvSpPr>
-          <p:cNvPr id="4" name="Rectangle 3"/>
-          <p:cNvSpPr/>
-          <p:nvPr/>
-        </p:nvSpPr>
-        <p:spPr>
-          <a:xfrm>
-            <a:off x="0" y="0"/>
-            <a:ext cx="12188952" cy="1371600"/>
-          </a:xfrm>
-          <a:prstGeom prst="rect">
-            <a:avLst/>
-          </a:prstGeom>
-          <a:solidFill>
-            <a:srgbClr val="00467F"/>
-          </a:solidFill>
-          <a:ln>
-            <a:noFill/>
-          </a:ln>
-        </p:spPr>
-        <p:style>
-          <a:lnRef idx="1">
-            <a:schemeClr val="accent1"/>
-          </a:lnRef>
-          <a:fillRef idx="3">
-            <a:schemeClr val="accent1"/>
-          </a:fillRef>
-          <a:effectRef idx="2">
-            <a:schemeClr val="accent1"/>
-          </a:effectRef>
-          <a:fontRef idx="minor">
-            <a:schemeClr val="lt1"/>
-          </a:fontRef>
-        </p:style>
-        <p:txBody>
-          <a:bodyPr rtlCol="0" anchor="ctr"/>
-          <a:lstStyle/>
-          <a:p>
-            <a:pPr algn="ctr"/>
-          </a:p>
-        </p:txBody>
-      </p:sp>
-      <p:sp>
-        <p:nvSpPr>
-          <p:cNvPr id="5" name="TextBox 4"/>
-          <p:cNvSpPr txBox="1"/>
-          <p:nvPr/>
-        </p:nvSpPr>
-        <p:spPr>
-          <a:xfrm>
-            <a:off x="365760" y="73152"/>
-            <a:ext cx="11274552" cy="411480"/>
-          </a:xfrm>
-          <a:prstGeom prst="rect">
-            <a:avLst/>
-          </a:prstGeom>
-          <a:noFill/>
-        </p:spPr>
-        <p:txBody>
-          <a:bodyPr wrap="square">
-            <a:spAutoFit/>
-          </a:bodyPr>
-          <a:lstStyle/>
-          <a:p>
-            <a:pPr algn="l"/>
-            <a:r>
-              <a:rPr sz="1100" b="1" i="0">
-                <a:solidFill>
-                  <a:srgbClr val="E7C14B"/>
-                </a:solidFill>
-                <a:latin typeface="Calibri"/>
-              </a:rPr>
-              <a:t>BARRERAS DEL SECTOR ARGENTINO</a:t>
-            </a:r>
-          </a:p>
-        </p:txBody>
-      </p:sp>
-      <p:sp>
-        <p:nvSpPr>
-          <p:cNvPr id="6" name="TextBox 5"/>
-          <p:cNvSpPr txBox="1"/>
-          <p:nvPr/>
-        </p:nvSpPr>
-        <p:spPr>
-          <a:xfrm>
-            <a:off x="365760" y="365760"/>
-            <a:ext cx="11091672" cy="914400"/>
-          </a:xfrm>
-          <a:prstGeom prst="rect">
-            <a:avLst/>
-          </a:prstGeom>
-          <a:noFill/>
-        </p:spPr>
-        <p:txBody>
-          <a:bodyPr wrap="square">
-            <a:spAutoFit/>
-          </a:bodyPr>
-          <a:lstStyle/>
-          <a:p>
-            <a:pPr algn="l"/>
-            <a:r>
-              <a:rPr sz="2600" b="1" i="0">
-                <a:solidFill>
-                  <a:srgbClr val="FFFFFF"/>
-                </a:solidFill>
-                <a:latin typeface="Calibri"/>
-              </a:rPr>
-              <a:t>La brecha tecnológica</a:t>
-            </a:r>
-          </a:p>
-        </p:txBody>
-      </p:sp>
-      <p:sp>
-        <p:nvSpPr>
-          <p:cNvPr id="7" name="Rectangle 6"/>
-          <p:cNvSpPr/>
-          <p:nvPr/>
-        </p:nvSpPr>
-        <p:spPr>
-          <a:xfrm>
-            <a:off x="457200" y="1508760"/>
-            <a:ext cx="11457432" cy="969264"/>
-          </a:xfrm>
-          <a:prstGeom prst="rect">
-            <a:avLst/>
-          </a:prstGeom>
-          <a:solidFill>
-            <a:srgbClr val="00467F"/>
-          </a:solidFill>
-          <a:ln>
-            <a:noFill/>
-          </a:ln>
-        </p:spPr>
-        <p:style>
-          <a:lnRef idx="1">
-            <a:schemeClr val="accent1"/>
-          </a:lnRef>
-          <a:fillRef idx="3">
-            <a:schemeClr val="accent1"/>
-          </a:fillRef>
-          <a:effectRef idx="2">
-            <a:schemeClr val="accent1"/>
-          </a:effectRef>
-          <a:fontRef idx="minor">
-            <a:schemeClr val="lt1"/>
-          </a:fontRef>
-        </p:style>
-        <p:txBody>
-          <a:bodyPr rtlCol="0" anchor="ctr"/>
-          <a:lstStyle/>
-          <a:p>
-            <a:pPr algn="ctr"/>
-          </a:p>
-        </p:txBody>
-      </p:sp>
-      <p:sp>
-        <p:nvSpPr>
-          <p:cNvPr id="8" name="TextBox 7"/>
-          <p:cNvSpPr txBox="1"/>
-          <p:nvPr/>
-        </p:nvSpPr>
-        <p:spPr>
-          <a:xfrm>
-            <a:off x="530352" y="1545336"/>
-            <a:ext cx="5637276" cy="896112"/>
-          </a:xfrm>
-          <a:prstGeom prst="rect">
-            <a:avLst/>
-          </a:prstGeom>
-          <a:noFill/>
-        </p:spPr>
-        <p:txBody>
-          <a:bodyPr wrap="square">
-            <a:spAutoFit/>
-          </a:bodyPr>
-          <a:lstStyle/>
-          <a:p>
-            <a:pPr algn="l"/>
-            <a:r>
-              <a:rPr sz="1300" b="1" i="0">
-                <a:solidFill>
-                  <a:srgbClr val="FFFFFF"/>
-                </a:solidFill>
-                <a:latin typeface="Calibri"/>
-              </a:rPr>
-              <a:t>Barrera</a:t>
-            </a:r>
-          </a:p>
-        </p:txBody>
-      </p:sp>
-      <p:sp>
-        <p:nvSpPr>
-          <p:cNvPr id="9" name="TextBox 8"/>
-          <p:cNvSpPr txBox="1"/>
-          <p:nvPr/>
-        </p:nvSpPr>
-        <p:spPr>
-          <a:xfrm>
-            <a:off x="6259068" y="1545336"/>
-            <a:ext cx="5637276" cy="896112"/>
-          </a:xfrm>
-          <a:prstGeom prst="rect">
-            <a:avLst/>
-          </a:prstGeom>
-          <a:noFill/>
-        </p:spPr>
-        <p:txBody>
-          <a:bodyPr wrap="square">
-            <a:spAutoFit/>
-          </a:bodyPr>
-          <a:lstStyle/>
-          <a:p>
-            <a:pPr algn="l"/>
-            <a:r>
-              <a:rPr sz="1300" b="1" i="0">
-                <a:solidFill>
-                  <a:srgbClr val="FFFFFF"/>
-                </a:solidFill>
-                <a:latin typeface="Calibri"/>
-              </a:rPr>
-              <a:t>Descripción</a:t>
-            </a:r>
-          </a:p>
-        </p:txBody>
-      </p:sp>
-      <p:sp>
-        <p:nvSpPr>
-          <p:cNvPr id="10" name="Rectangle 9"/>
-          <p:cNvSpPr/>
-          <p:nvPr/>
-        </p:nvSpPr>
-        <p:spPr>
-          <a:xfrm>
-            <a:off x="457200" y="2478024"/>
-            <a:ext cx="11457432" cy="969264"/>
-          </a:xfrm>
-          <a:prstGeom prst="rect">
-            <a:avLst/>
-          </a:prstGeom>
-          <a:solidFill>
-            <a:srgbClr val="F5F7FA"/>
-          </a:solidFill>
-          <a:ln>
-            <a:noFill/>
-          </a:ln>
-        </p:spPr>
-        <p:style>
-          <a:lnRef idx="1">
-            <a:schemeClr val="accent1"/>
-          </a:lnRef>
-          <a:fillRef idx="3">
-            <a:schemeClr val="accent1"/>
-          </a:fillRef>
-          <a:effectRef idx="2">
-            <a:schemeClr val="accent1"/>
-          </a:effectRef>
-          <a:fontRef idx="minor">
-            <a:schemeClr val="lt1"/>
-          </a:fontRef>
-        </p:style>
-        <p:txBody>
-          <a:bodyPr rtlCol="0" anchor="ctr"/>
-          <a:lstStyle/>
-          <a:p>
-            <a:pPr algn="ctr"/>
-          </a:p>
-        </p:txBody>
-      </p:sp>
-      <p:sp>
-        <p:nvSpPr>
-          <p:cNvPr id="11" name="TextBox 10"/>
-          <p:cNvSpPr txBox="1"/>
-          <p:nvPr/>
-        </p:nvSpPr>
-        <p:spPr>
-          <a:xfrm>
-            <a:off x="530352" y="2514600"/>
-            <a:ext cx="5637276" cy="896112"/>
-          </a:xfrm>
-          <a:prstGeom prst="rect">
-            <a:avLst/>
-          </a:prstGeom>
-          <a:noFill/>
-        </p:spPr>
-        <p:txBody>
-          <a:bodyPr wrap="square">
-            <a:spAutoFit/>
-          </a:bodyPr>
-          <a:lstStyle/>
-          <a:p>
-            <a:pPr algn="l"/>
-            <a:r>
-              <a:rPr sz="1300" b="1" i="0">
-                <a:solidFill>
-                  <a:srgbClr val="00467F"/>
-                </a:solidFill>
-                <a:latin typeface="Calibri"/>
-              </a:rPr>
-              <a:t>Formación</a:t>
-            </a:r>
-          </a:p>
-        </p:txBody>
-      </p:sp>
-      <p:sp>
-        <p:nvSpPr>
-          <p:cNvPr id="12" name="TextBox 11"/>
-          <p:cNvSpPr txBox="1"/>
-          <p:nvPr/>
-        </p:nvSpPr>
-        <p:spPr>
-          <a:xfrm>
-            <a:off x="6259068" y="2514600"/>
-            <a:ext cx="5637276" cy="896112"/>
-          </a:xfrm>
-          <a:prstGeom prst="rect">
-            <a:avLst/>
-          </a:prstGeom>
-          <a:noFill/>
-        </p:spPr>
-        <p:txBody>
-          <a:bodyPr wrap="square">
-            <a:spAutoFit/>
-          </a:bodyPr>
-          <a:lstStyle/>
-          <a:p>
-            <a:pPr algn="l"/>
-            <a:r>
-              <a:rPr sz="1300" b="0" i="0">
-                <a:solidFill>
-                  <a:srgbClr val="1E1E32"/>
-                </a:solidFill>
-                <a:latin typeface="Calibri"/>
-              </a:rPr>
-              <a:t>Faltan competencias en datos/IA</a:t>
-            </a:r>
-          </a:p>
-        </p:txBody>
-      </p:sp>
-      <p:sp>
-        <p:nvSpPr>
-          <p:cNvPr id="13" name="Rectangle 12"/>
-          <p:cNvSpPr/>
-          <p:nvPr/>
-        </p:nvSpPr>
-        <p:spPr>
-          <a:xfrm>
-            <a:off x="457200" y="3447288"/>
-            <a:ext cx="11457432" cy="969264"/>
-          </a:xfrm>
-          <a:prstGeom prst="rect">
-            <a:avLst/>
-          </a:prstGeom>
-          <a:solidFill>
-            <a:srgbClr val="FFFFFF"/>
-          </a:solidFill>
-          <a:ln>
-            <a:noFill/>
-          </a:ln>
-        </p:spPr>
-        <p:style>
-          <a:lnRef idx="1">
-            <a:schemeClr val="accent1"/>
-          </a:lnRef>
-          <a:fillRef idx="3">
-            <a:schemeClr val="accent1"/>
-          </a:fillRef>
-          <a:effectRef idx="2">
-            <a:schemeClr val="accent1"/>
-          </a:effectRef>
-          <a:fontRef idx="minor">
-            <a:schemeClr val="lt1"/>
-          </a:fontRef>
-        </p:style>
-        <p:txBody>
-          <a:bodyPr rtlCol="0" anchor="ctr"/>
-          <a:lstStyle/>
-          <a:p>
-            <a:pPr algn="ctr"/>
-          </a:p>
-        </p:txBody>
-      </p:sp>
-      <p:sp>
-        <p:nvSpPr>
-          <p:cNvPr id="14" name="TextBox 13"/>
-          <p:cNvSpPr txBox="1"/>
-          <p:nvPr/>
-        </p:nvSpPr>
-        <p:spPr>
-          <a:xfrm>
-            <a:off x="530352" y="3483864"/>
-            <a:ext cx="5637276" cy="896112"/>
-          </a:xfrm>
-          <a:prstGeom prst="rect">
-            <a:avLst/>
-          </a:prstGeom>
-          <a:noFill/>
-        </p:spPr>
-        <p:txBody>
-          <a:bodyPr wrap="square">
-            <a:spAutoFit/>
-          </a:bodyPr>
-          <a:lstStyle/>
-          <a:p>
-            <a:pPr algn="l"/>
-            <a:r>
-              <a:rPr sz="1300" b="1" i="0">
-                <a:solidFill>
-                  <a:srgbClr val="00467F"/>
-                </a:solidFill>
-                <a:latin typeface="Calibri"/>
-              </a:rPr>
-              <a:t>Conectividad</a:t>
-            </a:r>
-          </a:p>
-        </p:txBody>
-      </p:sp>
-      <p:sp>
-        <p:nvSpPr>
-          <p:cNvPr id="15" name="TextBox 14"/>
-          <p:cNvSpPr txBox="1"/>
-          <p:nvPr/>
-        </p:nvSpPr>
-        <p:spPr>
-          <a:xfrm>
-            <a:off x="6259068" y="3483864"/>
-            <a:ext cx="5637276" cy="896112"/>
-          </a:xfrm>
-          <a:prstGeom prst="rect">
-            <a:avLst/>
-          </a:prstGeom>
-          <a:noFill/>
-        </p:spPr>
-        <p:txBody>
-          <a:bodyPr wrap="square">
-            <a:spAutoFit/>
-          </a:bodyPr>
-          <a:lstStyle/>
-          <a:p>
-            <a:pPr algn="l"/>
-            <a:r>
-              <a:rPr sz="1300" b="0" i="0">
-                <a:solidFill>
-                  <a:srgbClr val="1E1E32"/>
-                </a:solidFill>
-                <a:latin typeface="Calibri"/>
-              </a:rPr>
-              <a:t>Cobertura limitada en alta mar</a:t>
-            </a:r>
-          </a:p>
-        </p:txBody>
-      </p:sp>
-      <p:sp>
-        <p:nvSpPr>
-          <p:cNvPr id="16" name="Rectangle 15"/>
-          <p:cNvSpPr/>
-          <p:nvPr/>
-        </p:nvSpPr>
-        <p:spPr>
-          <a:xfrm>
-            <a:off x="457200" y="4416552"/>
-            <a:ext cx="11457432" cy="969264"/>
-          </a:xfrm>
-          <a:prstGeom prst="rect">
-            <a:avLst/>
-          </a:prstGeom>
-          <a:solidFill>
-            <a:srgbClr val="F5F7FA"/>
-          </a:solidFill>
-          <a:ln>
-            <a:noFill/>
-          </a:ln>
-        </p:spPr>
-        <p:style>
-          <a:lnRef idx="1">
-            <a:schemeClr val="accent1"/>
-          </a:lnRef>
-          <a:fillRef idx="3">
-            <a:schemeClr val="accent1"/>
-          </a:fillRef>
-          <a:effectRef idx="2">
-            <a:schemeClr val="accent1"/>
-          </a:effectRef>
-          <a:fontRef idx="minor">
-            <a:schemeClr val="lt1"/>
-          </a:fontRef>
-        </p:style>
-        <p:txBody>
-          <a:bodyPr rtlCol="0" anchor="ctr"/>
-          <a:lstStyle/>
-          <a:p>
-            <a:pPr algn="ctr"/>
-          </a:p>
-        </p:txBody>
-      </p:sp>
-      <p:sp>
-        <p:nvSpPr>
-          <p:cNvPr id="17" name="TextBox 16"/>
-          <p:cNvSpPr txBox="1"/>
-          <p:nvPr/>
-        </p:nvSpPr>
-        <p:spPr>
-          <a:xfrm>
-            <a:off x="530352" y="4453128"/>
-            <a:ext cx="5637276" cy="896112"/>
-          </a:xfrm>
-          <a:prstGeom prst="rect">
-            <a:avLst/>
-          </a:prstGeom>
-          <a:noFill/>
-        </p:spPr>
-        <p:txBody>
-          <a:bodyPr wrap="square">
-            <a:spAutoFit/>
-          </a:bodyPr>
-          <a:lstStyle/>
-          <a:p>
-            <a:pPr algn="l"/>
-            <a:r>
-              <a:rPr sz="1300" b="1" i="0">
-                <a:solidFill>
-                  <a:srgbClr val="00467F"/>
-                </a:solidFill>
-                <a:latin typeface="Calibri"/>
-              </a:rPr>
-              <a:t>Inversión</a:t>
-            </a:r>
-          </a:p>
-        </p:txBody>
-      </p:sp>
-      <p:sp>
-        <p:nvSpPr>
-          <p:cNvPr id="18" name="TextBox 17"/>
-          <p:cNvSpPr txBox="1"/>
-          <p:nvPr/>
-        </p:nvSpPr>
-        <p:spPr>
-          <a:xfrm>
-            <a:off x="6259068" y="4453128"/>
-            <a:ext cx="5637276" cy="896112"/>
-          </a:xfrm>
-          <a:prstGeom prst="rect">
-            <a:avLst/>
-          </a:prstGeom>
-          <a:noFill/>
-        </p:spPr>
-        <p:txBody>
-          <a:bodyPr wrap="square">
-            <a:spAutoFit/>
-          </a:bodyPr>
-          <a:lstStyle/>
-          <a:p>
-            <a:pPr algn="l"/>
-            <a:r>
-              <a:rPr sz="1300" b="0" i="0">
-                <a:solidFill>
-                  <a:srgbClr val="1E1E32"/>
-                </a:solidFill>
-                <a:latin typeface="Calibri"/>
-              </a:rPr>
-              <a:t>Costo percibido alto</a:t>
-            </a:r>
-          </a:p>
-        </p:txBody>
-      </p:sp>
-      <p:sp>
-        <p:nvSpPr>
-          <p:cNvPr id="19" name="Rectangle 18"/>
-          <p:cNvSpPr/>
-          <p:nvPr/>
-        </p:nvSpPr>
-        <p:spPr>
-          <a:xfrm>
-            <a:off x="457200" y="5385816"/>
-            <a:ext cx="11457432" cy="969264"/>
-          </a:xfrm>
-          <a:prstGeom prst="rect">
-            <a:avLst/>
-          </a:prstGeom>
-          <a:solidFill>
-            <a:srgbClr val="FFFFFF"/>
-          </a:solidFill>
-          <a:ln>
-            <a:noFill/>
-          </a:ln>
-        </p:spPr>
-        <p:style>
-          <a:lnRef idx="1">
-            <a:schemeClr val="accent1"/>
-          </a:lnRef>
-          <a:fillRef idx="3">
-            <a:schemeClr val="accent1"/>
-          </a:fillRef>
-          <a:effectRef idx="2">
-            <a:schemeClr val="accent1"/>
-          </a:effectRef>
-          <a:fontRef idx="minor">
-            <a:schemeClr val="lt1"/>
-          </a:fontRef>
-        </p:style>
-        <p:txBody>
-          <a:bodyPr rtlCol="0" anchor="ctr"/>
-          <a:lstStyle/>
-          <a:p>
-            <a:pPr algn="ctr"/>
-          </a:p>
-        </p:txBody>
-      </p:sp>
-      <p:sp>
-        <p:nvSpPr>
-          <p:cNvPr id="20" name="TextBox 19"/>
-          <p:cNvSpPr txBox="1"/>
-          <p:nvPr/>
-        </p:nvSpPr>
-        <p:spPr>
-          <a:xfrm>
-            <a:off x="530352" y="5422392"/>
-            <a:ext cx="5637276" cy="896112"/>
-          </a:xfrm>
-          <a:prstGeom prst="rect">
-            <a:avLst/>
-          </a:prstGeom>
-          <a:noFill/>
-        </p:spPr>
-        <p:txBody>
-          <a:bodyPr wrap="square">
-            <a:spAutoFit/>
-          </a:bodyPr>
-          <a:lstStyle/>
-          <a:p>
-            <a:pPr algn="l"/>
-            <a:r>
-              <a:rPr sz="1300" b="1" i="0">
-                <a:solidFill>
-                  <a:srgbClr val="00467F"/>
-                </a:solidFill>
-                <a:latin typeface="Calibri"/>
-              </a:rPr>
-              <a:t>Cultura</a:t>
-            </a:r>
-          </a:p>
-        </p:txBody>
-      </p:sp>
-      <p:sp>
-        <p:nvSpPr>
-          <p:cNvPr id="21" name="TextBox 20"/>
-          <p:cNvSpPr txBox="1"/>
-          <p:nvPr/>
-        </p:nvSpPr>
-        <p:spPr>
-          <a:xfrm>
-            <a:off x="6259068" y="5422392"/>
-            <a:ext cx="5637276" cy="896112"/>
-          </a:xfrm>
-          <a:prstGeom prst="rect">
-            <a:avLst/>
-          </a:prstGeom>
-          <a:noFill/>
-        </p:spPr>
-        <p:txBody>
-          <a:bodyPr wrap="square">
-            <a:spAutoFit/>
-          </a:bodyPr>
-          <a:lstStyle/>
-          <a:p>
-            <a:pPr algn="l"/>
-            <a:r>
-              <a:rPr sz="1300" b="0" i="0">
-                <a:solidFill>
-                  <a:srgbClr val="1E1E32"/>
-                </a:solidFill>
-                <a:latin typeface="Calibri"/>
-              </a:rPr>
-              <a:t>Resistencia al cambio</a:t>
-            </a:r>
-          </a:p>
-        </p:txBody>
-      </p:sp>
-      <p:sp>
-        <p:nvSpPr>
-          <p:cNvPr id="22" name="Rectangle 21"/>
-          <p:cNvSpPr/>
-          <p:nvPr/>
-        </p:nvSpPr>
-        <p:spPr>
-          <a:xfrm>
-            <a:off x="457200" y="6336792"/>
-            <a:ext cx="11457432" cy="36576"/>
-          </a:xfrm>
-          <a:prstGeom prst="rect">
-            <a:avLst/>
-          </a:prstGeom>
-          <a:solidFill>
-            <a:srgbClr val="00467F"/>
-          </a:solidFill>
-          <a:ln>
-            <a:noFill/>
-          </a:ln>
-        </p:spPr>
-        <p:style>
-          <a:lnRef idx="1">
-            <a:schemeClr val="accent1"/>
-          </a:lnRef>
-          <a:fillRef idx="3">
-            <a:schemeClr val="accent1"/>
-          </a:fillRef>
-          <a:effectRef idx="2">
-            <a:schemeClr val="accent1"/>
-          </a:effectRef>
-          <a:fontRef idx="minor">
-            <a:schemeClr val="lt1"/>
-          </a:fontRef>
-        </p:style>
-        <p:txBody>
-          <a:bodyPr rtlCol="0" anchor="ctr"/>
-          <a:lstStyle/>
-          <a:p>
-            <a:pPr algn="ctr"/>
-          </a:p>
-        </p:txBody>
-      </p:sp>
-      <p:sp>
-        <p:nvSpPr>
-          <p:cNvPr id="23" name="Rectangle 22"/>
-          <p:cNvSpPr/>
-          <p:nvPr/>
-        </p:nvSpPr>
-        <p:spPr>
-          <a:xfrm>
-            <a:off x="0" y="6419088"/>
-            <a:ext cx="12188952" cy="438912"/>
-          </a:xfrm>
-          <a:prstGeom prst="rect">
-            <a:avLst/>
-          </a:prstGeom>
-          <a:solidFill>
-            <a:srgbClr val="00467F"/>
-          </a:solidFill>
-          <a:ln>
-            <a:noFill/>
-          </a:ln>
-        </p:spPr>
-        <p:style>
-          <a:lnRef idx="1">
-            <a:schemeClr val="accent1"/>
-          </a:lnRef>
-          <a:fillRef idx="3">
-            <a:schemeClr val="accent1"/>
-          </a:fillRef>
-          <a:effectRef idx="2">
-            <a:schemeClr val="accent1"/>
-          </a:effectRef>
-          <a:fontRef idx="minor">
-            <a:schemeClr val="lt1"/>
-          </a:fontRef>
-        </p:style>
-        <p:txBody>
-          <a:bodyPr rtlCol="0" anchor="ctr"/>
-          <a:lstStyle/>
-          <a:p>
-            <a:pPr algn="ctr"/>
-          </a:p>
-        </p:txBody>
-      </p:sp>
       <p:pic>
         <p:nvPicPr>
-          <p:cNvPr id="24" name="Picture 23" descr="logo_pesqueros_symbol.png"/>
+          <p:cNvPr id="2" name="Picture 1" descr="img_sostenibilidad.png"/>
           <p:cNvPicPr>
             <a:picLocks noChangeAspect="1"/>
           </p:cNvPicPr>
@@ -6136,49 +3713,14 @@
         </p:blipFill>
         <p:spPr>
           <a:xfrm>
-            <a:off x="137160" y="6455664"/>
-            <a:ext cx="347472" cy="347472"/>
+            <a:off x="0" y="0"/>
+            <a:ext cx="12192000" cy="6858000"/>
           </a:xfrm>
           <a:prstGeom prst="rect">
             <a:avLst/>
           </a:prstGeom>
         </p:spPr>
       </p:pic>
-      <p:sp>
-        <p:nvSpPr>
-          <p:cNvPr id="25" name="TextBox 24"/>
-          <p:cNvSpPr txBox="1"/>
-          <p:nvPr/>
-        </p:nvSpPr>
-        <p:spPr>
-          <a:xfrm>
-            <a:off x="594360" y="6455664"/>
-            <a:ext cx="11457432" cy="347472"/>
-          </a:xfrm>
-          <a:prstGeom prst="rect">
-            <a:avLst/>
-          </a:prstGeom>
-          <a:noFill/>
-        </p:spPr>
-        <p:txBody>
-          <a:bodyPr wrap="square">
-            <a:spAutoFit/>
-          </a:bodyPr>
-          <a:lstStyle/>
-          <a:p>
-            <a:pPr algn="ctr"/>
-            <a:r>
-              <a:rPr sz="1000" b="0" i="0">
-                <a:solidFill>
-                  <a:srgbClr val="FFFFFF"/>
-                </a:solidFill>
-                <a:latin typeface="Calibri"/>
-              </a:rPr>
-              <a:t>IA Aplicada a la Produccion Pesquera  |  UTN FRCh  |  PesquerosEnIA  |  2026</a:t>
-            </a:r>
-          </a:p>
-        </p:txBody>
-      </p:sp>
     </p:spTree>
   </p:cSld>
   <p:clrMapOvr>
@@ -6197,350 +3739,9 @@
         <p:nvPr/>
       </p:nvGrpSpPr>
       <p:grpSpPr/>
-      <p:sp>
-        <p:nvSpPr>
-          <p:cNvPr id="2" name="Rectangle 1"/>
-          <p:cNvSpPr/>
-          <p:nvPr/>
-        </p:nvSpPr>
-        <p:spPr>
-          <a:xfrm>
-            <a:off x="0" y="0"/>
-            <a:ext cx="12188952" cy="6858000"/>
-          </a:xfrm>
-          <a:prstGeom prst="rect">
-            <a:avLst/>
-          </a:prstGeom>
-          <a:solidFill>
-            <a:srgbClr val="F5F7FA"/>
-          </a:solidFill>
-          <a:ln>
-            <a:noFill/>
-          </a:ln>
-        </p:spPr>
-        <p:style>
-          <a:lnRef idx="1">
-            <a:schemeClr val="accent1"/>
-          </a:lnRef>
-          <a:fillRef idx="3">
-            <a:schemeClr val="accent1"/>
-          </a:fillRef>
-          <a:effectRef idx="2">
-            <a:schemeClr val="accent1"/>
-          </a:effectRef>
-          <a:fontRef idx="minor">
-            <a:schemeClr val="lt1"/>
-          </a:fontRef>
-        </p:style>
-        <p:txBody>
-          <a:bodyPr rtlCol="0" anchor="ctr"/>
-          <a:lstStyle/>
-          <a:p>
-            <a:pPr algn="ctr"/>
-          </a:p>
-        </p:txBody>
-      </p:sp>
-      <p:sp>
-        <p:nvSpPr>
-          <p:cNvPr id="3" name="Rectangle 2"/>
-          <p:cNvSpPr/>
-          <p:nvPr/>
-        </p:nvSpPr>
-        <p:spPr>
-          <a:xfrm>
-            <a:off x="0" y="0"/>
-            <a:ext cx="201168" cy="6858000"/>
-          </a:xfrm>
-          <a:prstGeom prst="rect">
-            <a:avLst/>
-          </a:prstGeom>
-          <a:solidFill>
-            <a:srgbClr val="00467F"/>
-          </a:solidFill>
-          <a:ln>
-            <a:noFill/>
-          </a:ln>
-        </p:spPr>
-        <p:style>
-          <a:lnRef idx="1">
-            <a:schemeClr val="accent1"/>
-          </a:lnRef>
-          <a:fillRef idx="3">
-            <a:schemeClr val="accent1"/>
-          </a:fillRef>
-          <a:effectRef idx="2">
-            <a:schemeClr val="accent1"/>
-          </a:effectRef>
-          <a:fontRef idx="minor">
-            <a:schemeClr val="lt1"/>
-          </a:fontRef>
-        </p:style>
-        <p:txBody>
-          <a:bodyPr rtlCol="0" anchor="ctr"/>
-          <a:lstStyle/>
-          <a:p>
-            <a:pPr algn="ctr"/>
-          </a:p>
-        </p:txBody>
-      </p:sp>
-      <p:sp>
-        <p:nvSpPr>
-          <p:cNvPr id="4" name="Rectangle 3"/>
-          <p:cNvSpPr/>
-          <p:nvPr/>
-        </p:nvSpPr>
-        <p:spPr>
-          <a:xfrm>
-            <a:off x="0" y="0"/>
-            <a:ext cx="12188952" cy="1371600"/>
-          </a:xfrm>
-          <a:prstGeom prst="rect">
-            <a:avLst/>
-          </a:prstGeom>
-          <a:solidFill>
-            <a:srgbClr val="00467F"/>
-          </a:solidFill>
-          <a:ln>
-            <a:noFill/>
-          </a:ln>
-        </p:spPr>
-        <p:style>
-          <a:lnRef idx="1">
-            <a:schemeClr val="accent1"/>
-          </a:lnRef>
-          <a:fillRef idx="3">
-            <a:schemeClr val="accent1"/>
-          </a:fillRef>
-          <a:effectRef idx="2">
-            <a:schemeClr val="accent1"/>
-          </a:effectRef>
-          <a:fontRef idx="minor">
-            <a:schemeClr val="lt1"/>
-          </a:fontRef>
-        </p:style>
-        <p:txBody>
-          <a:bodyPr rtlCol="0" anchor="ctr"/>
-          <a:lstStyle/>
-          <a:p>
-            <a:pPr algn="ctr"/>
-          </a:p>
-        </p:txBody>
-      </p:sp>
-      <p:sp>
-        <p:nvSpPr>
-          <p:cNvPr id="5" name="TextBox 4"/>
-          <p:cNvSpPr txBox="1"/>
-          <p:nvPr/>
-        </p:nvSpPr>
-        <p:spPr>
-          <a:xfrm>
-            <a:off x="365760" y="73152"/>
-            <a:ext cx="11274552" cy="411480"/>
-          </a:xfrm>
-          <a:prstGeom prst="rect">
-            <a:avLst/>
-          </a:prstGeom>
-          <a:noFill/>
-        </p:spPr>
-        <p:txBody>
-          <a:bodyPr wrap="square">
-            <a:spAutoFit/>
-          </a:bodyPr>
-          <a:lstStyle/>
-          <a:p>
-            <a:pPr algn="l"/>
-            <a:r>
-              <a:rPr sz="1100" b="1" i="0">
-                <a:solidFill>
-                  <a:srgbClr val="E7C14B"/>
-                </a:solidFill>
-                <a:latin typeface="Calibri"/>
-              </a:rPr>
-              <a:t>EL SECTOR SE MUEVE</a:t>
-            </a:r>
-          </a:p>
-        </p:txBody>
-      </p:sp>
-      <p:sp>
-        <p:nvSpPr>
-          <p:cNvPr id="6" name="TextBox 5"/>
-          <p:cNvSpPr txBox="1"/>
-          <p:nvPr/>
-        </p:nvSpPr>
-        <p:spPr>
-          <a:xfrm>
-            <a:off x="365760" y="365760"/>
-            <a:ext cx="11091672" cy="914400"/>
-          </a:xfrm>
-          <a:prstGeom prst="rect">
-            <a:avLst/>
-          </a:prstGeom>
-          <a:noFill/>
-        </p:spPr>
-        <p:txBody>
-          <a:bodyPr wrap="square">
-            <a:spAutoFit/>
-          </a:bodyPr>
-          <a:lstStyle/>
-          <a:p>
-            <a:pPr algn="l"/>
-            <a:r>
-              <a:rPr sz="2600" b="1" i="0">
-                <a:solidFill>
-                  <a:srgbClr val="FFFFFF"/>
-                </a:solidFill>
-                <a:latin typeface="Calibri"/>
-              </a:rPr>
-              <a:t>Señales positivas</a:t>
-            </a:r>
-          </a:p>
-        </p:txBody>
-      </p:sp>
-      <p:sp>
-        <p:nvSpPr>
-          <p:cNvPr id="7" name="TextBox 6"/>
-          <p:cNvSpPr txBox="1"/>
-          <p:nvPr/>
-        </p:nvSpPr>
-        <p:spPr>
-          <a:xfrm>
-            <a:off x="457200" y="1508760"/>
-            <a:ext cx="11457432" cy="5029200"/>
-          </a:xfrm>
-          <a:prstGeom prst="rect">
-            <a:avLst/>
-          </a:prstGeom>
-          <a:noFill/>
-        </p:spPr>
-        <p:txBody>
-          <a:bodyPr wrap="square">
-            <a:spAutoFit/>
-          </a:bodyPr>
-          <a:lstStyle/>
-          <a:p>
-            <a:pPr>
-              <a:spcBef>
-                <a:spcPts val="400"/>
-              </a:spcBef>
-              <a:spcAft>
-                <a:spcPts val="200"/>
-              </a:spcAft>
-            </a:pPr>
-            <a:r>
-              <a:rPr sz="1700" b="1">
-                <a:solidFill>
-                  <a:srgbClr val="1E1E32"/>
-                </a:solidFill>
-                <a:latin typeface="Calibri"/>
-              </a:rPr>
-              <a:t>• Pampa Azul: economía del conocimiento marina</a:t>
-            </a:r>
-          </a:p>
-          <a:p>
-            <a:pPr>
-              <a:spcBef>
-                <a:spcPts val="400"/>
-              </a:spcBef>
-              <a:spcAft>
-                <a:spcPts val="200"/>
-              </a:spcAft>
-            </a:pPr>
-            <a:r>
-              <a:rPr sz="1700" b="1">
-                <a:solidFill>
-                  <a:srgbClr val="1E1E32"/>
-                </a:solidFill>
-                <a:latin typeface="Calibri"/>
-              </a:rPr>
-              <a:t>• Starlink/OneWeb: conectividad a bordo</a:t>
-            </a:r>
-          </a:p>
-          <a:p>
-            <a:pPr>
-              <a:spcBef>
-                <a:spcPts val="400"/>
-              </a:spcBef>
-              <a:spcAft>
-                <a:spcPts val="200"/>
-              </a:spcAft>
-            </a:pPr>
-            <a:r>
-              <a:rPr sz="1700" b="1">
-                <a:solidFill>
-                  <a:srgbClr val="1E1E32"/>
-                </a:solidFill>
-                <a:latin typeface="Calibri"/>
-              </a:rPr>
-              <a:t>• INIDEP: datos históricos valiosos</a:t>
-            </a:r>
-          </a:p>
-          <a:p>
-            <a:pPr>
-              <a:spcBef>
-                <a:spcPts val="400"/>
-              </a:spcBef>
-              <a:spcAft>
-                <a:spcPts val="200"/>
-              </a:spcAft>
-            </a:pPr>
-            <a:r>
-              <a:rPr sz="1700" b="1">
-                <a:solidFill>
-                  <a:srgbClr val="1E1E32"/>
-                </a:solidFill>
-                <a:latin typeface="Calibri"/>
-              </a:rPr>
-              <a:t>• PesquerosEnIA: demanda de capacitación</a:t>
-            </a:r>
-          </a:p>
-        </p:txBody>
-      </p:sp>
-      <p:sp>
-        <p:nvSpPr>
-          <p:cNvPr id="8" name="Rectangle 7"/>
-          <p:cNvSpPr/>
-          <p:nvPr/>
-        </p:nvSpPr>
-        <p:spPr>
-          <a:xfrm>
-            <a:off x="0" y="6419088"/>
-            <a:ext cx="12188952" cy="438912"/>
-          </a:xfrm>
-          <a:prstGeom prst="rect">
-            <a:avLst/>
-          </a:prstGeom>
-          <a:solidFill>
-            <a:srgbClr val="00467F"/>
-          </a:solidFill>
-          <a:ln>
-            <a:noFill/>
-          </a:ln>
-        </p:spPr>
-        <p:style>
-          <a:lnRef idx="1">
-            <a:schemeClr val="accent1"/>
-          </a:lnRef>
-          <a:fillRef idx="3">
-            <a:schemeClr val="accent1"/>
-          </a:fillRef>
-          <a:effectRef idx="2">
-            <a:schemeClr val="accent1"/>
-          </a:effectRef>
-          <a:fontRef idx="minor">
-            <a:schemeClr val="lt1"/>
-          </a:fontRef>
-        </p:style>
-        <p:txBody>
-          <a:bodyPr rtlCol="0" anchor="ctr"/>
-          <a:lstStyle/>
-          <a:p>
-            <a:pPr algn="ctr"/>
-          </a:p>
-        </p:txBody>
-      </p:sp>
       <p:pic>
         <p:nvPicPr>
-          <p:cNvPr id="9" name="Picture 8" descr="logo_pesqueros_symbol.png"/>
+          <p:cNvPr id="2" name="Picture 1" descr="img_industria40.png"/>
           <p:cNvPicPr>
             <a:picLocks noChangeAspect="1"/>
           </p:cNvPicPr>
@@ -6554,49 +3755,14 @@
         </p:blipFill>
         <p:spPr>
           <a:xfrm>
-            <a:off x="137160" y="6455664"/>
-            <a:ext cx="347472" cy="347472"/>
+            <a:off x="0" y="0"/>
+            <a:ext cx="12192000" cy="6858000"/>
           </a:xfrm>
           <a:prstGeom prst="rect">
             <a:avLst/>
           </a:prstGeom>
         </p:spPr>
       </p:pic>
-      <p:sp>
-        <p:nvSpPr>
-          <p:cNvPr id="10" name="TextBox 9"/>
-          <p:cNvSpPr txBox="1"/>
-          <p:nvPr/>
-        </p:nvSpPr>
-        <p:spPr>
-          <a:xfrm>
-            <a:off x="594360" y="6455664"/>
-            <a:ext cx="11457432" cy="347472"/>
-          </a:xfrm>
-          <a:prstGeom prst="rect">
-            <a:avLst/>
-          </a:prstGeom>
-          <a:noFill/>
-        </p:spPr>
-        <p:txBody>
-          <a:bodyPr wrap="square">
-            <a:spAutoFit/>
-          </a:bodyPr>
-          <a:lstStyle/>
-          <a:p>
-            <a:pPr algn="ctr"/>
-            <a:r>
-              <a:rPr sz="1000" b="0" i="0">
-                <a:solidFill>
-                  <a:srgbClr val="FFFFFF"/>
-                </a:solidFill>
-                <a:latin typeface="Calibri"/>
-              </a:rPr>
-              <a:t>IA Aplicada a la Produccion Pesquera  |  UTN FRCh  |  PesquerosEnIA  |  2026</a:t>
-            </a:r>
-          </a:p>
-        </p:txBody>
-      </p:sp>
     </p:spTree>
   </p:cSld>
   <p:clrMapOvr>
@@ -6615,181 +3781,9 @@
         <p:nvPr/>
       </p:nvGrpSpPr>
       <p:grpSpPr/>
-      <p:sp>
-        <p:nvSpPr>
-          <p:cNvPr id="2" name="Rectangle 1"/>
-          <p:cNvSpPr/>
-          <p:nvPr/>
-        </p:nvSpPr>
-        <p:spPr>
-          <a:xfrm>
-            <a:off x="0" y="0"/>
-            <a:ext cx="12188952" cy="6858000"/>
-          </a:xfrm>
-          <a:prstGeom prst="rect">
-            <a:avLst/>
-          </a:prstGeom>
-          <a:solidFill>
-            <a:srgbClr val="00467F"/>
-          </a:solidFill>
-          <a:ln>
-            <a:noFill/>
-          </a:ln>
-        </p:spPr>
-        <p:style>
-          <a:lnRef idx="1">
-            <a:schemeClr val="accent1"/>
-          </a:lnRef>
-          <a:fillRef idx="3">
-            <a:schemeClr val="accent1"/>
-          </a:fillRef>
-          <a:effectRef idx="2">
-            <a:schemeClr val="accent1"/>
-          </a:effectRef>
-          <a:fontRef idx="minor">
-            <a:schemeClr val="lt1"/>
-          </a:fontRef>
-        </p:style>
-        <p:txBody>
-          <a:bodyPr rtlCol="0" anchor="ctr"/>
-          <a:lstStyle/>
-          <a:p>
-            <a:pPr algn="ctr"/>
-          </a:p>
-        </p:txBody>
-      </p:sp>
-      <p:sp>
-        <p:nvSpPr>
-          <p:cNvPr id="3" name="Rectangle 2"/>
-          <p:cNvSpPr/>
-          <p:nvPr/>
-        </p:nvSpPr>
-        <p:spPr>
-          <a:xfrm>
-            <a:off x="8714232" y="0"/>
-            <a:ext cx="3474720" cy="6858000"/>
-          </a:xfrm>
-          <a:prstGeom prst="rect">
-            <a:avLst/>
-          </a:prstGeom>
-          <a:solidFill>
-            <a:srgbClr val="003C6B"/>
-          </a:solidFill>
-          <a:ln>
-            <a:noFill/>
-          </a:ln>
-        </p:spPr>
-        <p:style>
-          <a:lnRef idx="1">
-            <a:schemeClr val="accent1"/>
-          </a:lnRef>
-          <a:fillRef idx="3">
-            <a:schemeClr val="accent1"/>
-          </a:fillRef>
-          <a:effectRef idx="2">
-            <a:schemeClr val="accent1"/>
-          </a:effectRef>
-          <a:fontRef idx="minor">
-            <a:schemeClr val="lt1"/>
-          </a:fontRef>
-        </p:style>
-        <p:txBody>
-          <a:bodyPr rtlCol="0" anchor="ctr"/>
-          <a:lstStyle/>
-          <a:p>
-            <a:pPr algn="ctr"/>
-          </a:p>
-        </p:txBody>
-      </p:sp>
-      <p:sp>
-        <p:nvSpPr>
-          <p:cNvPr id="4" name="Rectangle 3"/>
-          <p:cNvSpPr/>
-          <p:nvPr/>
-        </p:nvSpPr>
-        <p:spPr>
-          <a:xfrm>
-            <a:off x="0" y="0"/>
-            <a:ext cx="12188952" cy="91440"/>
-          </a:xfrm>
-          <a:prstGeom prst="rect">
-            <a:avLst/>
-          </a:prstGeom>
-          <a:solidFill>
-            <a:srgbClr val="D4A017"/>
-          </a:solidFill>
-          <a:ln>
-            <a:noFill/>
-          </a:ln>
-        </p:spPr>
-        <p:style>
-          <a:lnRef idx="1">
-            <a:schemeClr val="accent1"/>
-          </a:lnRef>
-          <a:fillRef idx="3">
-            <a:schemeClr val="accent1"/>
-          </a:fillRef>
-          <a:effectRef idx="2">
-            <a:schemeClr val="accent1"/>
-          </a:effectRef>
-          <a:fontRef idx="minor">
-            <a:schemeClr val="lt1"/>
-          </a:fontRef>
-        </p:style>
-        <p:txBody>
-          <a:bodyPr rtlCol="0" anchor="ctr"/>
-          <a:lstStyle/>
-          <a:p>
-            <a:pPr algn="ctr"/>
-          </a:p>
-        </p:txBody>
-      </p:sp>
-      <p:sp>
-        <p:nvSpPr>
-          <p:cNvPr id="5" name="Rectangle 4"/>
-          <p:cNvSpPr/>
-          <p:nvPr/>
-        </p:nvSpPr>
-        <p:spPr>
-          <a:xfrm>
-            <a:off x="0" y="6766560"/>
-            <a:ext cx="12188952" cy="91440"/>
-          </a:xfrm>
-          <a:prstGeom prst="rect">
-            <a:avLst/>
-          </a:prstGeom>
-          <a:solidFill>
-            <a:srgbClr val="D4A017"/>
-          </a:solidFill>
-          <a:ln>
-            <a:noFill/>
-          </a:ln>
-        </p:spPr>
-        <p:style>
-          <a:lnRef idx="1">
-            <a:schemeClr val="accent1"/>
-          </a:lnRef>
-          <a:fillRef idx="3">
-            <a:schemeClr val="accent1"/>
-          </a:fillRef>
-          <a:effectRef idx="2">
-            <a:schemeClr val="accent1"/>
-          </a:effectRef>
-          <a:fontRef idx="minor">
-            <a:schemeClr val="lt1"/>
-          </a:fontRef>
-        </p:style>
-        <p:txBody>
-          <a:bodyPr rtlCol="0" anchor="ctr"/>
-          <a:lstStyle/>
-          <a:p>
-            <a:pPr algn="ctr"/>
-          </a:p>
-        </p:txBody>
-      </p:sp>
       <p:pic>
         <p:nvPicPr>
-          <p:cNvPr id="6" name="Picture 5" descr="logo_utn_frch_negro.png"/>
+          <p:cNvPr id="2" name="Picture 1" descr="reuse_ciclo.png"/>
           <p:cNvPicPr>
             <a:picLocks noChangeAspect="1"/>
           </p:cNvPicPr>
@@ -6803,402 +3797,14 @@
         </p:blipFill>
         <p:spPr>
           <a:xfrm>
-            <a:off x="365760" y="155448"/>
-            <a:ext cx="1366857" cy="731520"/>
+            <a:off x="0" y="0"/>
+            <a:ext cx="12192000" cy="6858000"/>
           </a:xfrm>
           <a:prstGeom prst="rect">
             <a:avLst/>
           </a:prstGeom>
         </p:spPr>
       </p:pic>
-      <p:pic>
-        <p:nvPicPr>
-          <p:cNvPr id="7" name="Picture 6" descr="logo_pesqueros_full.png"/>
-          <p:cNvPicPr>
-            <a:picLocks noChangeAspect="1"/>
-          </p:cNvPicPr>
-          <p:nvPr/>
-        </p:nvPicPr>
-        <p:blipFill>
-          <a:blip r:embed="rId3"/>
-          <a:stretch>
-            <a:fillRect/>
-          </a:stretch>
-        </p:blipFill>
-        <p:spPr>
-          <a:xfrm>
-            <a:off x="2926080" y="201168"/>
-            <a:ext cx="1981200" cy="594360"/>
-          </a:xfrm>
-          <a:prstGeom prst="rect">
-            <a:avLst/>
-          </a:prstGeom>
-        </p:spPr>
-      </p:pic>
-      <p:pic>
-        <p:nvPicPr>
-          <p:cNvPr id="8" name="Picture 7" descr="logo_ariel_symbol.png"/>
-          <p:cNvPicPr>
-            <a:picLocks noChangeAspect="1"/>
-          </p:cNvPicPr>
-          <p:nvPr/>
-        </p:nvPicPr>
-        <p:blipFill>
-          <a:blip r:embed="rId4"/>
-          <a:stretch>
-            <a:fillRect/>
-          </a:stretch>
-        </p:blipFill>
-        <p:spPr>
-          <a:xfrm>
-            <a:off x="5120640" y="201168"/>
-            <a:ext cx="1981200" cy="594360"/>
-          </a:xfrm>
-          <a:prstGeom prst="rect">
-            <a:avLst/>
-          </a:prstGeom>
-        </p:spPr>
-      </p:pic>
-      <p:sp>
-        <p:nvSpPr>
-          <p:cNvPr id="9" name="Rectangle 8"/>
-          <p:cNvSpPr/>
-          <p:nvPr/>
-        </p:nvSpPr>
-        <p:spPr>
-          <a:xfrm>
-            <a:off x="365760" y="1078992"/>
-            <a:ext cx="8348472" cy="32004"/>
-          </a:xfrm>
-          <a:prstGeom prst="rect">
-            <a:avLst/>
-          </a:prstGeom>
-          <a:solidFill>
-            <a:srgbClr val="0099CC"/>
-          </a:solidFill>
-          <a:ln>
-            <a:noFill/>
-          </a:ln>
-        </p:spPr>
-        <p:style>
-          <a:lnRef idx="1">
-            <a:schemeClr val="accent1"/>
-          </a:lnRef>
-          <a:fillRef idx="3">
-            <a:schemeClr val="accent1"/>
-          </a:fillRef>
-          <a:effectRef idx="2">
-            <a:schemeClr val="accent1"/>
-          </a:effectRef>
-          <a:fontRef idx="minor">
-            <a:schemeClr val="lt1"/>
-          </a:fontRef>
-        </p:style>
-        <p:txBody>
-          <a:bodyPr rtlCol="0" anchor="ctr"/>
-          <a:lstStyle/>
-          <a:p>
-            <a:pPr algn="ctr"/>
-          </a:p>
-        </p:txBody>
-      </p:sp>
-      <p:sp>
-        <p:nvSpPr>
-          <p:cNvPr id="10" name="TextBox 9"/>
-          <p:cNvSpPr txBox="1"/>
-          <p:nvPr/>
-        </p:nvSpPr>
-        <p:spPr>
-          <a:xfrm>
-            <a:off x="365760" y="1280160"/>
-            <a:ext cx="8074152" cy="1645920"/>
-          </a:xfrm>
-          <a:prstGeom prst="rect">
-            <a:avLst/>
-          </a:prstGeom>
-          <a:noFill/>
-        </p:spPr>
-        <p:txBody>
-          <a:bodyPr wrap="square">
-            <a:spAutoFit/>
-          </a:bodyPr>
-          <a:lstStyle/>
-          <a:p>
-            <a:pPr algn="l"/>
-            <a:r>
-              <a:rPr sz="3200" b="1" i="0">
-                <a:solidFill>
-                  <a:srgbClr val="FFFFFF"/>
-                </a:solidFill>
-                <a:latin typeface="Calibri"/>
-              </a:rPr>
-              <a:t>IA con datos pesqueros, para problemas pesqueros</a:t>
-            </a:r>
-          </a:p>
-        </p:txBody>
-      </p:sp>
-      <p:sp>
-        <p:nvSpPr>
-          <p:cNvPr id="11" name="TextBox 10"/>
-          <p:cNvSpPr txBox="1"/>
-          <p:nvPr/>
-        </p:nvSpPr>
-        <p:spPr>
-          <a:xfrm>
-            <a:off x="365760" y="2880360"/>
-            <a:ext cx="8074152" cy="685800"/>
-          </a:xfrm>
-          <a:prstGeom prst="rect">
-            <a:avLst/>
-          </a:prstGeom>
-          <a:noFill/>
-        </p:spPr>
-        <p:txBody>
-          <a:bodyPr wrap="square">
-            <a:spAutoFit/>
-          </a:bodyPr>
-          <a:lstStyle/>
-          <a:p>
-            <a:pPr algn="l"/>
-            <a:r>
-              <a:rPr sz="1600" b="0" i="0">
-                <a:solidFill>
-                  <a:srgbClr val="5AC8F0"/>
-                </a:solidFill>
-                <a:latin typeface="Calibri"/>
-              </a:rPr>
-              <a:t>en español y desde el sector</a:t>
-            </a:r>
-          </a:p>
-        </p:txBody>
-      </p:sp>
-      <p:sp>
-        <p:nvSpPr>
-          <p:cNvPr id="12" name="Rectangle 11"/>
-          <p:cNvSpPr/>
-          <p:nvPr/>
-        </p:nvSpPr>
-        <p:spPr>
-          <a:xfrm>
-            <a:off x="365760" y="3703320"/>
-            <a:ext cx="5029200" cy="32004"/>
-          </a:xfrm>
-          <a:prstGeom prst="rect">
-            <a:avLst/>
-          </a:prstGeom>
-          <a:solidFill>
-            <a:srgbClr val="D4A017"/>
-          </a:solidFill>
-          <a:ln>
-            <a:noFill/>
-          </a:ln>
-        </p:spPr>
-        <p:style>
-          <a:lnRef idx="1">
-            <a:schemeClr val="accent1"/>
-          </a:lnRef>
-          <a:fillRef idx="3">
-            <a:schemeClr val="accent1"/>
-          </a:fillRef>
-          <a:effectRef idx="2">
-            <a:schemeClr val="accent1"/>
-          </a:effectRef>
-          <a:fontRef idx="minor">
-            <a:schemeClr val="lt1"/>
-          </a:fontRef>
-        </p:style>
-        <p:txBody>
-          <a:bodyPr rtlCol="0" anchor="ctr"/>
-          <a:lstStyle/>
-          <a:p>
-            <a:pPr algn="ctr"/>
-          </a:p>
-        </p:txBody>
-      </p:sp>
-      <p:sp>
-        <p:nvSpPr>
-          <p:cNvPr id="13" name="TextBox 12"/>
-          <p:cNvSpPr txBox="1"/>
-          <p:nvPr/>
-        </p:nvSpPr>
-        <p:spPr>
-          <a:xfrm>
-            <a:off x="365760" y="3794760"/>
-            <a:ext cx="7772400" cy="502920"/>
-          </a:xfrm>
-          <a:prstGeom prst="rect">
-            <a:avLst/>
-          </a:prstGeom>
-          <a:noFill/>
-        </p:spPr>
-        <p:txBody>
-          <a:bodyPr wrap="square">
-            <a:spAutoFit/>
-          </a:bodyPr>
-          <a:lstStyle/>
-          <a:p>
-            <a:pPr algn="l"/>
-            <a:r>
-              <a:rPr sz="1400" b="0" i="0">
-                <a:solidFill>
-                  <a:srgbClr val="BEE1FF"/>
-                </a:solidFill>
-                <a:latin typeface="Consolas"/>
-              </a:rPr>
-              <a:t>github.com/PesquerosEnIA/curso-ia-produccion-pesquera</a:t>
-            </a:r>
-          </a:p>
-        </p:txBody>
-      </p:sp>
-      <p:sp>
-        <p:nvSpPr>
-          <p:cNvPr id="14" name="Rectangle 13"/>
-          <p:cNvSpPr/>
-          <p:nvPr/>
-        </p:nvSpPr>
-        <p:spPr>
-          <a:xfrm>
-            <a:off x="365760" y="4434840"/>
-            <a:ext cx="7772400" cy="822960"/>
-          </a:xfrm>
-          <a:prstGeom prst="rect">
-            <a:avLst/>
-          </a:prstGeom>
-          <a:solidFill>
-            <a:srgbClr val="0064B1"/>
-          </a:solidFill>
-          <a:ln>
-            <a:noFill/>
-          </a:ln>
-        </p:spPr>
-        <p:style>
-          <a:lnRef idx="1">
-            <a:schemeClr val="accent1"/>
-          </a:lnRef>
-          <a:fillRef idx="3">
-            <a:schemeClr val="accent1"/>
-          </a:fillRef>
-          <a:effectRef idx="2">
-            <a:schemeClr val="accent1"/>
-          </a:effectRef>
-          <a:fontRef idx="minor">
-            <a:schemeClr val="lt1"/>
-          </a:fontRef>
-        </p:style>
-        <p:txBody>
-          <a:bodyPr rtlCol="0" anchor="ctr"/>
-          <a:lstStyle/>
-          <a:p>
-            <a:pPr algn="ctr"/>
-          </a:p>
-        </p:txBody>
-      </p:sp>
-      <p:sp>
-        <p:nvSpPr>
-          <p:cNvPr id="15" name="TextBox 14"/>
-          <p:cNvSpPr txBox="1"/>
-          <p:nvPr/>
-        </p:nvSpPr>
-        <p:spPr>
-          <a:xfrm>
-            <a:off x="502920" y="4480560"/>
-            <a:ext cx="7498079" cy="731520"/>
-          </a:xfrm>
-          <a:prstGeom prst="rect">
-            <a:avLst/>
-          </a:prstGeom>
-          <a:noFill/>
-        </p:spPr>
-        <p:txBody>
-          <a:bodyPr wrap="square">
-            <a:spAutoFit/>
-          </a:bodyPr>
-          <a:lstStyle/>
-          <a:p>
-            <a:pPr algn="l"/>
-            <a:r>
-              <a:rPr sz="1300" b="0" i="0">
-                <a:solidFill>
-                  <a:srgbClr val="FFFFFF"/>
-                </a:solidFill>
-                <a:latin typeface="Calibri"/>
-              </a:rPr>
-              <a:t>Clase 4: Datos y Sensores</a:t>
-            </a:r>
-          </a:p>
-        </p:txBody>
-      </p:sp>
-      <p:sp>
-        <p:nvSpPr>
-          <p:cNvPr id="16" name="TextBox 15"/>
-          <p:cNvSpPr txBox="1"/>
-          <p:nvPr/>
-        </p:nvSpPr>
-        <p:spPr>
-          <a:xfrm>
-            <a:off x="8988552" y="2011680"/>
-            <a:ext cx="2926080" cy="1280160"/>
-          </a:xfrm>
-          <a:prstGeom prst="rect">
-            <a:avLst/>
-          </a:prstGeom>
-          <a:noFill/>
-        </p:spPr>
-        <p:txBody>
-          <a:bodyPr wrap="square">
-            <a:spAutoFit/>
-          </a:bodyPr>
-          <a:lstStyle/>
-          <a:p>
-            <a:pPr algn="ctr"/>
-            <a:r>
-              <a:rPr sz="1600" b="0" i="0">
-                <a:solidFill>
-                  <a:srgbClr val="B4D7FF"/>
-                </a:solidFill>
-                <a:latin typeface="Consolas"/>
-              </a:rPr>
-              <a:t>github.com/
-PesquerosEnIA</a:t>
-            </a:r>
-          </a:p>
-        </p:txBody>
-      </p:sp>
-      <p:sp>
-        <p:nvSpPr>
-          <p:cNvPr id="17" name="TextBox 16"/>
-          <p:cNvSpPr txBox="1"/>
-          <p:nvPr/>
-        </p:nvSpPr>
-        <p:spPr>
-          <a:xfrm>
-            <a:off x="365760" y="6382512"/>
-            <a:ext cx="8074152" cy="384048"/>
-          </a:xfrm>
-          <a:prstGeom prst="rect">
-            <a:avLst/>
-          </a:prstGeom>
-          <a:noFill/>
-        </p:spPr>
-        <p:txBody>
-          <a:bodyPr wrap="square">
-            <a:spAutoFit/>
-          </a:bodyPr>
-          <a:lstStyle/>
-          <a:p>
-            <a:pPr algn="l"/>
-            <a:r>
-              <a:rPr sz="1100" b="0" i="0">
-                <a:solidFill>
-                  <a:srgbClr val="3A454D"/>
-                </a:solidFill>
-                <a:latin typeface="Calibri"/>
-              </a:rPr>
-              <a:t>UTN FRCh  |  PesquerosEnIA  |  2026</a:t>
-            </a:r>
-          </a:p>
-        </p:txBody>
-      </p:sp>
     </p:spTree>
   </p:cSld>
   <p:clrMapOvr>
@@ -7219,7 +3825,7 @@
       <p:grpSpPr/>
       <p:pic>
         <p:nvPicPr>
-          <p:cNvPr id="2" name="Picture 1" descr="c1_1.png"/>
+          <p:cNvPr id="2" name="Picture 1" descr="img_pilares.png"/>
           <p:cNvPicPr>
             <a:picLocks noChangeAspect="1"/>
           </p:cNvPicPr>
@@ -7234,7 +3840,7 @@
         <p:spPr>
           <a:xfrm>
             <a:off x="0" y="0"/>
-            <a:ext cx="12188952" cy="6858000"/>
+            <a:ext cx="12192000" cy="6858000"/>
           </a:xfrm>
           <a:prstGeom prst="rect">
             <a:avLst/>
@@ -7261,7 +3867,7 @@
       <p:grpSpPr/>
       <p:pic>
         <p:nvPicPr>
-          <p:cNvPr id="2" name="Picture 1" descr="c1_2.png"/>
+          <p:cNvPr id="2" name="Picture 1" descr="reuse_casos.png"/>
           <p:cNvPicPr>
             <a:picLocks noChangeAspect="1"/>
           </p:cNvPicPr>
@@ -7276,7 +3882,7 @@
         <p:spPr>
           <a:xfrm>
             <a:off x="0" y="0"/>
-            <a:ext cx="12188952" cy="6858000"/>
+            <a:ext cx="12192000" cy="6858000"/>
           </a:xfrm>
           <a:prstGeom prst="rect">
             <a:avLst/>
